--- a/public/lessons/year-6-maths/summer/week-22/reason-about-equivalent-equations/teaching-powerpoint-v1.pptx
+++ b/public/lessons/year-6-maths/summer/week-22/reason-about-equivalent-equations/teaching-powerpoint-v1.pptx
@@ -2,24 +2,24 @@
 <file path=ppt/presentation.xml><?xml version="1.0" encoding="utf-8"?>
 <p:presentation xmlns:p="http://schemas.openxmlformats.org/presentationml/2006/main">
   <p:sldMasterIdLst>
-    <p:sldMasterId xmlns:r="http://schemas.openxmlformats.org/officeDocument/2006/relationships" id="2147483648" r:id="Redcb16e0da1a49ed"/>
+    <p:sldMasterId xmlns:r="http://schemas.openxmlformats.org/officeDocument/2006/relationships" id="2147483648" r:id="R26f20d35af5d4ff3"/>
   </p:sldMasterIdLst>
   <p:notesMasterIdLst>
-    <p:notesMasterId xmlns:r="http://schemas.openxmlformats.org/officeDocument/2006/relationships" r:id="R1887794547ea4ed2"/>
+    <p:notesMasterId xmlns:r="http://schemas.openxmlformats.org/officeDocument/2006/relationships" r:id="R8e84c06d6c9f4adc"/>
   </p:notesMasterIdLst>
   <p:sldIdLst>
-    <p:sldId xmlns:r="http://schemas.openxmlformats.org/officeDocument/2006/relationships" id="256" r:id="R306fe3f787c04f22"/>
-    <p:sldId xmlns:r="http://schemas.openxmlformats.org/officeDocument/2006/relationships" id="257" r:id="Rdf66afe944fc4522"/>
-    <p:sldId xmlns:r="http://schemas.openxmlformats.org/officeDocument/2006/relationships" id="258" r:id="Rf01e8b0f21874de5"/>
-    <p:sldId xmlns:r="http://schemas.openxmlformats.org/officeDocument/2006/relationships" id="259" r:id="Rc0b1c467bbd44609"/>
-    <p:sldId xmlns:r="http://schemas.openxmlformats.org/officeDocument/2006/relationships" id="260" r:id="R3289716a441449d4"/>
-    <p:sldId xmlns:r="http://schemas.openxmlformats.org/officeDocument/2006/relationships" id="261" r:id="Rf9a3ce375b834877"/>
-    <p:sldId xmlns:r="http://schemas.openxmlformats.org/officeDocument/2006/relationships" id="262" r:id="Rc0796efef0b64f2f"/>
-    <p:sldId xmlns:r="http://schemas.openxmlformats.org/officeDocument/2006/relationships" id="263" r:id="R33bac0b8ddc94536"/>
-    <p:sldId xmlns:r="http://schemas.openxmlformats.org/officeDocument/2006/relationships" id="264" r:id="Rc988bf98e8e348de"/>
-    <p:sldId xmlns:r="http://schemas.openxmlformats.org/officeDocument/2006/relationships" id="265" r:id="R6b4767c350c64fc0"/>
-    <p:sldId xmlns:r="http://schemas.openxmlformats.org/officeDocument/2006/relationships" id="266" r:id="R8e754643abb74344"/>
-    <p:sldId xmlns:r="http://schemas.openxmlformats.org/officeDocument/2006/relationships" id="267" r:id="Rf9e51b1323524821"/>
+    <p:sldId xmlns:r="http://schemas.openxmlformats.org/officeDocument/2006/relationships" id="256" r:id="R29a389f1405949fa"/>
+    <p:sldId xmlns:r="http://schemas.openxmlformats.org/officeDocument/2006/relationships" id="257" r:id="R9468ea301f124354"/>
+    <p:sldId xmlns:r="http://schemas.openxmlformats.org/officeDocument/2006/relationships" id="258" r:id="Raa895ea40d9a4c65"/>
+    <p:sldId xmlns:r="http://schemas.openxmlformats.org/officeDocument/2006/relationships" id="259" r:id="R9a0baa0ceab1481b"/>
+    <p:sldId xmlns:r="http://schemas.openxmlformats.org/officeDocument/2006/relationships" id="260" r:id="Rb21fd0c7dd0e4e0d"/>
+    <p:sldId xmlns:r="http://schemas.openxmlformats.org/officeDocument/2006/relationships" id="261" r:id="Rca6dfeb1c2084eb4"/>
+    <p:sldId xmlns:r="http://schemas.openxmlformats.org/officeDocument/2006/relationships" id="262" r:id="Rdf72a61d759c475f"/>
+    <p:sldId xmlns:r="http://schemas.openxmlformats.org/officeDocument/2006/relationships" id="263" r:id="R0678d86290cd460e"/>
+    <p:sldId xmlns:r="http://schemas.openxmlformats.org/officeDocument/2006/relationships" id="264" r:id="R5c177cd597054c25"/>
+    <p:sldId xmlns:r="http://schemas.openxmlformats.org/officeDocument/2006/relationships" id="265" r:id="R57b520bf66ff49e5"/>
+    <p:sldId xmlns:r="http://schemas.openxmlformats.org/officeDocument/2006/relationships" id="266" r:id="R7511268dad8d413a"/>
+    <p:sldId xmlns:r="http://schemas.openxmlformats.org/officeDocument/2006/relationships" id="267" r:id="R481136331e244f36"/>
   </p:sldIdLst>
   <p:sldSz cx="12192000" cy="6858000"/>
   <p:notesSz cx="6858000" cy="9144000"/>
@@ -873,7 +873,7 @@
           <a:lstStyle xmlns:a="http://schemas.openxmlformats.org/drawingml/2006/main"/>
           <a:p xmlns:a="http://schemas.openxmlformats.org/drawingml/2006/main">
             <a:r>
-              <a:t>I do. Reveal the question, setup and each calculation stage one click at a time. Pupils watch before copying. Model answer: Yes, both give x = 7.</a:t>
+              <a:t>I do. Reveal the question, then reveal each mathematical change one click at a time. Point to the numbers and operation that changed before moving to the next line. Final answer: Yes, both give x = 7.</a:t>
             </a:r>
           </a:p>
         </p:txBody>
@@ -1291,7 +1291,7 @@
   </p:cSld>
   <p:clrMap bg1="lt1" tx1="dk1" bg2="lt2" tx2="dk2" accent1="accent1" accent2="accent2" accent3="accent3" accent4="accent4" accent5="accent5" accent6="accent6" hlink="hlink" folHlink="folHlink"/>
   <p:sldLayoutIdLst>
-    <p:sldLayoutId xmlns:r="http://schemas.openxmlformats.org/officeDocument/2006/relationships" id="2147483649" r:id="R059c23cac0194f87"/>
+    <p:sldLayoutId xmlns:r="http://schemas.openxmlformats.org/officeDocument/2006/relationships" id="2147483649" r:id="R3c52ebce993e4662"/>
   </p:sldLayoutIdLst>
   <p:txStyles>
     <p:titleStyle>
@@ -1842,7 +1842,7 @@
           <p:cNvPr id="12" name="">
             <a:extLst xmlns:a="http://schemas.openxmlformats.org/drawingml/2006/main">
               <a:ext uri="{FF2B5EF4-FFF2-40B4-BE49-F238E27FC236}">
-                <a16:creationId xmlns:a16="http://schemas.microsoft.com/office/drawing/2014/main" id="{A6268A60-BA39-4645-AB66-34DFCC318182}"/>
+                <a16:creationId xmlns:a16="http://schemas.microsoft.com/office/drawing/2014/main" id="{AAB85C88-B0AC-4E36-AF23-2382D045E504}"/>
               </a:ext>
             </a:extLst>
           </p:cNvPr>
@@ -1874,7 +1874,7 @@
           <p:cNvPr id="2" name="">
             <a:extLst xmlns:a="http://schemas.openxmlformats.org/drawingml/2006/main">
               <a:ext uri="{FF2B5EF4-FFF2-40B4-BE49-F238E27FC236}">
-                <a16:creationId xmlns:a16="http://schemas.microsoft.com/office/drawing/2014/main" id="{C245C6B0-A65B-4219-9C79-6A0C14426740}"/>
+                <a16:creationId xmlns:a16="http://schemas.microsoft.com/office/drawing/2014/main" id="{12F0DBE9-B296-4A3D-94E6-2B53743E9738}"/>
               </a:ext>
             </a:extLst>
           </p:cNvPr>
@@ -1931,7 +1931,7 @@
           <p:cNvPr id="3" name="">
             <a:extLst xmlns:a="http://schemas.openxmlformats.org/drawingml/2006/main">
               <a:ext uri="{FF2B5EF4-FFF2-40B4-BE49-F238E27FC236}">
-                <a16:creationId xmlns:a16="http://schemas.microsoft.com/office/drawing/2014/main" id="{67F7D1B8-0A1C-4358-8422-A5A5F30D487D}"/>
+                <a16:creationId xmlns:a16="http://schemas.microsoft.com/office/drawing/2014/main" id="{DD3DE72E-D882-4255-8B70-20C4E84CFA94}"/>
               </a:ext>
             </a:extLst>
           </p:cNvPr>
@@ -1965,7 +1965,7 @@
           <p:cNvPr id="4" name="">
             <a:extLst xmlns:a="http://schemas.openxmlformats.org/drawingml/2006/main">
               <a:ext uri="{FF2B5EF4-FFF2-40B4-BE49-F238E27FC236}">
-                <a16:creationId xmlns:a16="http://schemas.microsoft.com/office/drawing/2014/main" id="{3EDAF31A-6248-47F1-A44A-CB5B8EC10318}"/>
+                <a16:creationId xmlns:a16="http://schemas.microsoft.com/office/drawing/2014/main" id="{81B7C988-BCAC-4F4C-9845-10A40363AB06}"/>
               </a:ext>
             </a:extLst>
           </p:cNvPr>
@@ -2022,7 +2022,7 @@
           <p:cNvPr id="5" name="">
             <a:extLst xmlns:a="http://schemas.openxmlformats.org/drawingml/2006/main">
               <a:ext uri="{FF2B5EF4-FFF2-40B4-BE49-F238E27FC236}">
-                <a16:creationId xmlns:a16="http://schemas.microsoft.com/office/drawing/2014/main" id="{CEC497B6-C1B8-423B-A303-6F444BD2850F}"/>
+                <a16:creationId xmlns:a16="http://schemas.microsoft.com/office/drawing/2014/main" id="{D1739145-4C9A-4A8A-9532-02C5544423D3}"/>
               </a:ext>
             </a:extLst>
           </p:cNvPr>
@@ -2079,7 +2079,7 @@
           <p:cNvPr id="6" name="">
             <a:extLst xmlns:a="http://schemas.openxmlformats.org/drawingml/2006/main">
               <a:ext uri="{FF2B5EF4-FFF2-40B4-BE49-F238E27FC236}">
-                <a16:creationId xmlns:a16="http://schemas.microsoft.com/office/drawing/2014/main" id="{9E2FB5E0-1B21-4057-BE57-92BEDBB428C8}"/>
+                <a16:creationId xmlns:a16="http://schemas.microsoft.com/office/drawing/2014/main" id="{C5AAC0F6-31C9-444E-B7BE-FF980DCC40A4}"/>
               </a:ext>
             </a:extLst>
           </p:cNvPr>
@@ -2113,7 +2113,7 @@
           <p:cNvPr id="7" name="">
             <a:extLst xmlns:a="http://schemas.openxmlformats.org/drawingml/2006/main">
               <a:ext uri="{FF2B5EF4-FFF2-40B4-BE49-F238E27FC236}">
-                <a16:creationId xmlns:a16="http://schemas.microsoft.com/office/drawing/2014/main" id="{9BBFBF1F-49EA-4903-ABB1-2604AB832245}"/>
+                <a16:creationId xmlns:a16="http://schemas.microsoft.com/office/drawing/2014/main" id="{BA84531A-6284-44D2-BE5B-2652F69461D0}"/>
               </a:ext>
             </a:extLst>
           </p:cNvPr>
@@ -2170,7 +2170,7 @@
           <p:cNvPr id="8" name="">
             <a:extLst xmlns:a="http://schemas.openxmlformats.org/drawingml/2006/main">
               <a:ext uri="{FF2B5EF4-FFF2-40B4-BE49-F238E27FC236}">
-                <a16:creationId xmlns:a16="http://schemas.microsoft.com/office/drawing/2014/main" id="{A6DE8CB3-A672-47E1-8A4B-36E5139CBC9D}"/>
+                <a16:creationId xmlns:a16="http://schemas.microsoft.com/office/drawing/2014/main" id="{88C05794-30A4-447D-98D4-6B272CB11F9D}"/>
               </a:ext>
             </a:extLst>
           </p:cNvPr>
@@ -2227,7 +2227,7 @@
           <p:cNvPr id="9" name="">
             <a:extLst xmlns:a="http://schemas.openxmlformats.org/drawingml/2006/main">
               <a:ext uri="{FF2B5EF4-FFF2-40B4-BE49-F238E27FC236}">
-                <a16:creationId xmlns:a16="http://schemas.microsoft.com/office/drawing/2014/main" id="{7885C5DA-EEC0-4EBA-8A57-3D3F9944F42E}"/>
+                <a16:creationId xmlns:a16="http://schemas.microsoft.com/office/drawing/2014/main" id="{9D02E8DC-4CB8-4885-9587-3F71B60BD15B}"/>
               </a:ext>
             </a:extLst>
           </p:cNvPr>
@@ -2284,7 +2284,7 @@
           <p:cNvPr id="10" name="">
             <a:extLst xmlns:a="http://schemas.openxmlformats.org/drawingml/2006/main">
               <a:ext uri="{FF2B5EF4-FFF2-40B4-BE49-F238E27FC236}">
-                <a16:creationId xmlns:a16="http://schemas.microsoft.com/office/drawing/2014/main" id="{2A83F487-BEC0-46F8-A623-8BCC3C53AD52}"/>
+                <a16:creationId xmlns:a16="http://schemas.microsoft.com/office/drawing/2014/main" id="{CCEF88B4-1C31-4173-B5C6-6B87DAB8A8DD}"/>
               </a:ext>
             </a:extLst>
           </p:cNvPr>
@@ -2341,7 +2341,7 @@
           <p:cNvPr id="11" name="">
             <a:extLst xmlns:a="http://schemas.openxmlformats.org/drawingml/2006/main">
               <a:ext uri="{FF2B5EF4-FFF2-40B4-BE49-F238E27FC236}">
-                <a16:creationId xmlns:a16="http://schemas.microsoft.com/office/drawing/2014/main" id="{02C2CA64-AE11-4C68-9210-170BC1A3E043}"/>
+                <a16:creationId xmlns:a16="http://schemas.microsoft.com/office/drawing/2014/main" id="{A654CAAC-4674-46CA-B20E-5F1846477709}"/>
               </a:ext>
             </a:extLst>
           </p:cNvPr>
@@ -2396,7 +2396,7 @@
     </p:spTree>
     <p:extLst>
       <p:ext uri="{BB962C8B-B14F-4D97-AF65-F5344CB8AC3E}">
-        <p14:creationId xmlns:p14="http://schemas.microsoft.com/office/powerpoint/2010/main" val="2059057227"/>
+        <p14:creationId xmlns:p14="http://schemas.microsoft.com/office/powerpoint/2010/main" val="487099088"/>
       </p:ext>
     </p:extLst>
   </p:cSld>
@@ -2427,7 +2427,7 @@
           <p:cNvPr id="14" name="">
             <a:extLst xmlns:a="http://schemas.openxmlformats.org/drawingml/2006/main">
               <a:ext uri="{FF2B5EF4-FFF2-40B4-BE49-F238E27FC236}">
-                <a16:creationId xmlns:a16="http://schemas.microsoft.com/office/drawing/2014/main" id="{C55317AC-6A4D-49FE-9A16-CF621EF7066A}"/>
+                <a16:creationId xmlns:a16="http://schemas.microsoft.com/office/drawing/2014/main" id="{645B9992-F140-4301-96AB-7FE47339E4BA}"/>
               </a:ext>
             </a:extLst>
           </p:cNvPr>
@@ -2459,7 +2459,7 @@
           <p:cNvPr id="2" name="">
             <a:extLst xmlns:a="http://schemas.openxmlformats.org/drawingml/2006/main">
               <a:ext uri="{FF2B5EF4-FFF2-40B4-BE49-F238E27FC236}">
-                <a16:creationId xmlns:a16="http://schemas.microsoft.com/office/drawing/2014/main" id="{E6EC709A-6991-489D-9A77-03C5C013FE0C}"/>
+                <a16:creationId xmlns:a16="http://schemas.microsoft.com/office/drawing/2014/main" id="{359CF78A-7D16-4024-A283-57518516FFDB}"/>
               </a:ext>
             </a:extLst>
           </p:cNvPr>
@@ -2516,7 +2516,7 @@
           <p:cNvPr id="3" name="">
             <a:extLst xmlns:a="http://schemas.openxmlformats.org/drawingml/2006/main">
               <a:ext uri="{FF2B5EF4-FFF2-40B4-BE49-F238E27FC236}">
-                <a16:creationId xmlns:a16="http://schemas.microsoft.com/office/drawing/2014/main" id="{E2020FA5-47BC-4D44-A73B-7AA5F667A7CF}"/>
+                <a16:creationId xmlns:a16="http://schemas.microsoft.com/office/drawing/2014/main" id="{E16B9846-8D1F-4F72-9545-52A10A28EA62}"/>
               </a:ext>
             </a:extLst>
           </p:cNvPr>
@@ -2548,7 +2548,7 @@
           <p:cNvPr id="4" name="">
             <a:extLst xmlns:a="http://schemas.openxmlformats.org/drawingml/2006/main">
               <a:ext uri="{FF2B5EF4-FFF2-40B4-BE49-F238E27FC236}">
-                <a16:creationId xmlns:a16="http://schemas.microsoft.com/office/drawing/2014/main" id="{5AB7A978-E262-4325-A4F3-A00FC50E9728}"/>
+                <a16:creationId xmlns:a16="http://schemas.microsoft.com/office/drawing/2014/main" id="{A5651C3A-AC24-4131-9329-5F1B1E4E30E1}"/>
               </a:ext>
             </a:extLst>
           </p:cNvPr>
@@ -2605,7 +2605,7 @@
           <p:cNvPr id="5" name="">
             <a:extLst xmlns:a="http://schemas.openxmlformats.org/drawingml/2006/main">
               <a:ext uri="{FF2B5EF4-FFF2-40B4-BE49-F238E27FC236}">
-                <a16:creationId xmlns:a16="http://schemas.microsoft.com/office/drawing/2014/main" id="{6EEEBEF0-1F8D-4855-84D1-2C7994591A33}"/>
+                <a16:creationId xmlns:a16="http://schemas.microsoft.com/office/drawing/2014/main" id="{B378C431-F2E2-451F-B842-BE19428C5D2E}"/>
               </a:ext>
             </a:extLst>
           </p:cNvPr>
@@ -2662,7 +2662,7 @@
           <p:cNvPr id="6" name="">
             <a:extLst xmlns:a="http://schemas.openxmlformats.org/drawingml/2006/main">
               <a:ext uri="{FF2B5EF4-FFF2-40B4-BE49-F238E27FC236}">
-                <a16:creationId xmlns:a16="http://schemas.microsoft.com/office/drawing/2014/main" id="{A4391043-196C-48C8-8103-5E9594D7D8EC}"/>
+                <a16:creationId xmlns:a16="http://schemas.microsoft.com/office/drawing/2014/main" id="{99BF1CC7-C646-4B6C-9078-7FFF86A436CF}"/>
               </a:ext>
             </a:extLst>
           </p:cNvPr>
@@ -2719,7 +2719,7 @@
           <p:cNvPr id="7" name="">
             <a:extLst xmlns:a="http://schemas.openxmlformats.org/drawingml/2006/main">
               <a:ext uri="{FF2B5EF4-FFF2-40B4-BE49-F238E27FC236}">
-                <a16:creationId xmlns:a16="http://schemas.microsoft.com/office/drawing/2014/main" id="{992B8A20-918C-4EFA-AD0B-2E67BE7D7352}"/>
+                <a16:creationId xmlns:a16="http://schemas.microsoft.com/office/drawing/2014/main" id="{60839BE6-781C-4734-8D32-2C9F2D0D6808}"/>
               </a:ext>
             </a:extLst>
           </p:cNvPr>
@@ -2751,7 +2751,7 @@
           <p:cNvPr id="8" name="">
             <a:extLst xmlns:a="http://schemas.openxmlformats.org/drawingml/2006/main">
               <a:ext uri="{FF2B5EF4-FFF2-40B4-BE49-F238E27FC236}">
-                <a16:creationId xmlns:a16="http://schemas.microsoft.com/office/drawing/2014/main" id="{055B1EA2-7FAA-4F0A-A9D8-228488896453}"/>
+                <a16:creationId xmlns:a16="http://schemas.microsoft.com/office/drawing/2014/main" id="{C115E96B-4ACD-4E8C-9FAF-B039FF1669B0}"/>
               </a:ext>
             </a:extLst>
           </p:cNvPr>
@@ -2808,7 +2808,7 @@
           <p:cNvPr id="9" name="">
             <a:extLst xmlns:a="http://schemas.openxmlformats.org/drawingml/2006/main">
               <a:ext uri="{FF2B5EF4-FFF2-40B4-BE49-F238E27FC236}">
-                <a16:creationId xmlns:a16="http://schemas.microsoft.com/office/drawing/2014/main" id="{39711E83-DA98-4981-B3E6-DCC173FAD80C}"/>
+                <a16:creationId xmlns:a16="http://schemas.microsoft.com/office/drawing/2014/main" id="{FCD7410F-03EF-4BA8-9F8D-AE828EC08BC2}"/>
               </a:ext>
             </a:extLst>
           </p:cNvPr>
@@ -2865,7 +2865,7 @@
           <p:cNvPr id="10" name="">
             <a:extLst xmlns:a="http://schemas.openxmlformats.org/drawingml/2006/main">
               <a:ext uri="{FF2B5EF4-FFF2-40B4-BE49-F238E27FC236}">
-                <a16:creationId xmlns:a16="http://schemas.microsoft.com/office/drawing/2014/main" id="{4053DE24-63BF-44CB-8BF7-2D2F1114EF1A}"/>
+                <a16:creationId xmlns:a16="http://schemas.microsoft.com/office/drawing/2014/main" id="{61307A25-781F-4489-836B-4294FB455A04}"/>
               </a:ext>
             </a:extLst>
           </p:cNvPr>
@@ -2922,7 +2922,7 @@
           <p:cNvPr id="11" name="">
             <a:extLst xmlns:a="http://schemas.openxmlformats.org/drawingml/2006/main">
               <a:ext uri="{FF2B5EF4-FFF2-40B4-BE49-F238E27FC236}">
-                <a16:creationId xmlns:a16="http://schemas.microsoft.com/office/drawing/2014/main" id="{EA625FAB-471E-47B8-A07F-6378102027C8}"/>
+                <a16:creationId xmlns:a16="http://schemas.microsoft.com/office/drawing/2014/main" id="{53BD569C-56B0-486A-98D9-9C9F2F57727F}"/>
               </a:ext>
             </a:extLst>
           </p:cNvPr>
@@ -2979,7 +2979,7 @@
           <p:cNvPr id="12" name="">
             <a:extLst xmlns:a="http://schemas.openxmlformats.org/drawingml/2006/main">
               <a:ext uri="{FF2B5EF4-FFF2-40B4-BE49-F238E27FC236}">
-                <a16:creationId xmlns:a16="http://schemas.microsoft.com/office/drawing/2014/main" id="{1DC04B2A-32FE-472E-8B64-296217C3D336}"/>
+                <a16:creationId xmlns:a16="http://schemas.microsoft.com/office/drawing/2014/main" id="{EED05BA9-8278-46F3-A9A4-91527D0820D8}"/>
               </a:ext>
             </a:extLst>
           </p:cNvPr>
@@ -3036,7 +3036,7 @@
           <p:cNvPr id="13" name="">
             <a:extLst xmlns:a="http://schemas.openxmlformats.org/drawingml/2006/main">
               <a:ext uri="{FF2B5EF4-FFF2-40B4-BE49-F238E27FC236}">
-                <a16:creationId xmlns:a16="http://schemas.microsoft.com/office/drawing/2014/main" id="{B87DEC6B-2F7A-4F15-AB34-9F4DA66FC4A0}"/>
+                <a16:creationId xmlns:a16="http://schemas.microsoft.com/office/drawing/2014/main" id="{9D6F4B78-8483-4570-85A0-F62EEB0A0675}"/>
               </a:ext>
             </a:extLst>
           </p:cNvPr>
@@ -3091,7 +3091,7 @@
     </p:spTree>
     <p:extLst>
       <p:ext uri="{BB962C8B-B14F-4D97-AF65-F5344CB8AC3E}">
-        <p14:creationId xmlns:p14="http://schemas.microsoft.com/office/powerpoint/2010/main" val="311751306"/>
+        <p14:creationId xmlns:p14="http://schemas.microsoft.com/office/powerpoint/2010/main" val="1636570448"/>
       </p:ext>
     </p:extLst>
   </p:cSld>
@@ -3292,7 +3292,7 @@
           <p:cNvPr id="19" name="">
             <a:extLst xmlns:a="http://schemas.openxmlformats.org/drawingml/2006/main">
               <a:ext uri="{FF2B5EF4-FFF2-40B4-BE49-F238E27FC236}">
-                <a16:creationId xmlns:a16="http://schemas.microsoft.com/office/drawing/2014/main" id="{4A3A9399-04B6-4ACC-B941-F6BFD7E1F5EA}"/>
+                <a16:creationId xmlns:a16="http://schemas.microsoft.com/office/drawing/2014/main" id="{0EB1DCB6-BD87-478B-B01F-498BEBE7EA21}"/>
               </a:ext>
             </a:extLst>
           </p:cNvPr>
@@ -3324,7 +3324,7 @@
           <p:cNvPr id="2" name="">
             <a:extLst xmlns:a="http://schemas.openxmlformats.org/drawingml/2006/main">
               <a:ext uri="{FF2B5EF4-FFF2-40B4-BE49-F238E27FC236}">
-                <a16:creationId xmlns:a16="http://schemas.microsoft.com/office/drawing/2014/main" id="{16EDD514-CE9D-4E4C-B83E-90F2415BAABF}"/>
+                <a16:creationId xmlns:a16="http://schemas.microsoft.com/office/drawing/2014/main" id="{8B41E7E2-4632-46BA-9F7D-F3954F13D6F3}"/>
               </a:ext>
             </a:extLst>
           </p:cNvPr>
@@ -3381,7 +3381,7 @@
           <p:cNvPr id="3" name="">
             <a:extLst xmlns:a="http://schemas.openxmlformats.org/drawingml/2006/main">
               <a:ext uri="{FF2B5EF4-FFF2-40B4-BE49-F238E27FC236}">
-                <a16:creationId xmlns:a16="http://schemas.microsoft.com/office/drawing/2014/main" id="{B4312FC0-9BCE-4579-B45C-2451A6E0083C}"/>
+                <a16:creationId xmlns:a16="http://schemas.microsoft.com/office/drawing/2014/main" id="{89AC0176-7FCA-4636-9EDD-98D622F7ACE7}"/>
               </a:ext>
             </a:extLst>
           </p:cNvPr>
@@ -3413,7 +3413,7 @@
           <p:cNvPr id="4" name="">
             <a:extLst xmlns:a="http://schemas.openxmlformats.org/drawingml/2006/main">
               <a:ext uri="{FF2B5EF4-FFF2-40B4-BE49-F238E27FC236}">
-                <a16:creationId xmlns:a16="http://schemas.microsoft.com/office/drawing/2014/main" id="{AC114A32-4C63-45B2-A35A-7650EF69391A}"/>
+                <a16:creationId xmlns:a16="http://schemas.microsoft.com/office/drawing/2014/main" id="{1BDAF6CC-E416-48B9-BB90-EFDC81953EF4}"/>
               </a:ext>
             </a:extLst>
           </p:cNvPr>
@@ -3470,7 +3470,7 @@
           <p:cNvPr id="5" name="">
             <a:extLst xmlns:a="http://schemas.openxmlformats.org/drawingml/2006/main">
               <a:ext uri="{FF2B5EF4-FFF2-40B4-BE49-F238E27FC236}">
-                <a16:creationId xmlns:a16="http://schemas.microsoft.com/office/drawing/2014/main" id="{0D32454D-FEF2-401C-9397-BBB907B4A659}"/>
+                <a16:creationId xmlns:a16="http://schemas.microsoft.com/office/drawing/2014/main" id="{EC0A8B40-27CA-4302-BDE9-09584751A477}"/>
               </a:ext>
             </a:extLst>
           </p:cNvPr>
@@ -3527,7 +3527,7 @@
           <p:cNvPr id="6" name="">
             <a:extLst xmlns:a="http://schemas.openxmlformats.org/drawingml/2006/main">
               <a:ext uri="{FF2B5EF4-FFF2-40B4-BE49-F238E27FC236}">
-                <a16:creationId xmlns:a16="http://schemas.microsoft.com/office/drawing/2014/main" id="{39CC96B9-D8F1-4A2D-A3E0-3E06EC0C5918}"/>
+                <a16:creationId xmlns:a16="http://schemas.microsoft.com/office/drawing/2014/main" id="{CBFD6B90-C265-4753-AEC6-0FE64F165200}"/>
               </a:ext>
             </a:extLst>
           </p:cNvPr>
@@ -3584,7 +3584,7 @@
           <p:cNvPr id="7" name="">
             <a:extLst xmlns:a="http://schemas.openxmlformats.org/drawingml/2006/main">
               <a:ext uri="{FF2B5EF4-FFF2-40B4-BE49-F238E27FC236}">
-                <a16:creationId xmlns:a16="http://schemas.microsoft.com/office/drawing/2014/main" id="{CBDC5D19-85F3-4059-9855-8FE36546B4B6}"/>
+                <a16:creationId xmlns:a16="http://schemas.microsoft.com/office/drawing/2014/main" id="{7D31D0CE-AB73-4AF6-BA6A-A079AF999784}"/>
               </a:ext>
             </a:extLst>
           </p:cNvPr>
@@ -3616,7 +3616,7 @@
           <p:cNvPr id="8" name="">
             <a:extLst xmlns:a="http://schemas.openxmlformats.org/drawingml/2006/main">
               <a:ext uri="{FF2B5EF4-FFF2-40B4-BE49-F238E27FC236}">
-                <a16:creationId xmlns:a16="http://schemas.microsoft.com/office/drawing/2014/main" id="{312CF255-6F99-4EA6-A7FE-98B8ACC49AB2}"/>
+                <a16:creationId xmlns:a16="http://schemas.microsoft.com/office/drawing/2014/main" id="{FF3DCFA4-A87D-4E3A-B981-57243F2D584C}"/>
               </a:ext>
             </a:extLst>
           </p:cNvPr>
@@ -3673,7 +3673,7 @@
           <p:cNvPr id="9" name="">
             <a:extLst xmlns:a="http://schemas.openxmlformats.org/drawingml/2006/main">
               <a:ext uri="{FF2B5EF4-FFF2-40B4-BE49-F238E27FC236}">
-                <a16:creationId xmlns:a16="http://schemas.microsoft.com/office/drawing/2014/main" id="{C2DCED62-9077-4229-9898-323602EA0264}"/>
+                <a16:creationId xmlns:a16="http://schemas.microsoft.com/office/drawing/2014/main" id="{2322F9B2-58BD-4F93-B230-100D29B36380}"/>
               </a:ext>
             </a:extLst>
           </p:cNvPr>
@@ -3730,7 +3730,7 @@
           <p:cNvPr id="10" name="">
             <a:extLst xmlns:a="http://schemas.openxmlformats.org/drawingml/2006/main">
               <a:ext uri="{FF2B5EF4-FFF2-40B4-BE49-F238E27FC236}">
-                <a16:creationId xmlns:a16="http://schemas.microsoft.com/office/drawing/2014/main" id="{EE480880-6308-463B-BB92-3888BA50B8D8}"/>
+                <a16:creationId xmlns:a16="http://schemas.microsoft.com/office/drawing/2014/main" id="{8B96E56D-9409-4D9D-8C00-A559FC64407A}"/>
               </a:ext>
             </a:extLst>
           </p:cNvPr>
@@ -3787,7 +3787,7 @@
           <p:cNvPr id="11" name="">
             <a:extLst xmlns:a="http://schemas.openxmlformats.org/drawingml/2006/main">
               <a:ext uri="{FF2B5EF4-FFF2-40B4-BE49-F238E27FC236}">
-                <a16:creationId xmlns:a16="http://schemas.microsoft.com/office/drawing/2014/main" id="{C8088572-B2D6-4655-A44C-1F09B26C323C}"/>
+                <a16:creationId xmlns:a16="http://schemas.microsoft.com/office/drawing/2014/main" id="{A417D516-4E6B-40CB-A733-97A584D0D7E3}"/>
               </a:ext>
             </a:extLst>
           </p:cNvPr>
@@ -3821,7 +3821,7 @@
           <p:cNvPr id="12" name="">
             <a:extLst xmlns:a="http://schemas.openxmlformats.org/drawingml/2006/main">
               <a:ext uri="{FF2B5EF4-FFF2-40B4-BE49-F238E27FC236}">
-                <a16:creationId xmlns:a16="http://schemas.microsoft.com/office/drawing/2014/main" id="{A3EECDF0-89B6-4946-B3ED-49AA6547C66A}"/>
+                <a16:creationId xmlns:a16="http://schemas.microsoft.com/office/drawing/2014/main" id="{2A4451A9-65FF-48F0-A4A7-D65F294296C7}"/>
               </a:ext>
             </a:extLst>
           </p:cNvPr>
@@ -3878,7 +3878,7 @@
           <p:cNvPr id="13" name="">
             <a:extLst xmlns:a="http://schemas.openxmlformats.org/drawingml/2006/main">
               <a:ext uri="{FF2B5EF4-FFF2-40B4-BE49-F238E27FC236}">
-                <a16:creationId xmlns:a16="http://schemas.microsoft.com/office/drawing/2014/main" id="{D5565A45-C057-4185-8BD6-1EFB9B33E210}"/>
+                <a16:creationId xmlns:a16="http://schemas.microsoft.com/office/drawing/2014/main" id="{B1C5C722-ACFC-46A4-B76C-22B19FC1E3B7}"/>
               </a:ext>
             </a:extLst>
           </p:cNvPr>
@@ -3935,7 +3935,7 @@
           <p:cNvPr id="14" name="">
             <a:extLst xmlns:a="http://schemas.openxmlformats.org/drawingml/2006/main">
               <a:ext uri="{FF2B5EF4-FFF2-40B4-BE49-F238E27FC236}">
-                <a16:creationId xmlns:a16="http://schemas.microsoft.com/office/drawing/2014/main" id="{AB329A82-6757-4B2D-8550-893052575D6F}"/>
+                <a16:creationId xmlns:a16="http://schemas.microsoft.com/office/drawing/2014/main" id="{ACE2985F-52B2-4E4D-B67A-6F54E1C01795}"/>
               </a:ext>
             </a:extLst>
           </p:cNvPr>
@@ -3992,7 +3992,7 @@
           <p:cNvPr id="15" name="">
             <a:extLst xmlns:a="http://schemas.openxmlformats.org/drawingml/2006/main">
               <a:ext uri="{FF2B5EF4-FFF2-40B4-BE49-F238E27FC236}">
-                <a16:creationId xmlns:a16="http://schemas.microsoft.com/office/drawing/2014/main" id="{AD075434-CF36-4097-A233-2963D76B53E8}"/>
+                <a16:creationId xmlns:a16="http://schemas.microsoft.com/office/drawing/2014/main" id="{4488D82C-5973-4CD3-A2F7-46AD5247634E}"/>
               </a:ext>
             </a:extLst>
           </p:cNvPr>
@@ -4026,7 +4026,7 @@
           <p:cNvPr id="16" name="">
             <a:extLst xmlns:a="http://schemas.openxmlformats.org/drawingml/2006/main">
               <a:ext uri="{FF2B5EF4-FFF2-40B4-BE49-F238E27FC236}">
-                <a16:creationId xmlns:a16="http://schemas.microsoft.com/office/drawing/2014/main" id="{624E2D04-2883-4705-860C-CEA53FDCFF91}"/>
+                <a16:creationId xmlns:a16="http://schemas.microsoft.com/office/drawing/2014/main" id="{CF6F2522-74A9-46A1-B5D7-DA9DFFAB75BE}"/>
               </a:ext>
             </a:extLst>
           </p:cNvPr>
@@ -4083,7 +4083,7 @@
           <p:cNvPr id="17" name="">
             <a:extLst xmlns:a="http://schemas.openxmlformats.org/drawingml/2006/main">
               <a:ext uri="{FF2B5EF4-FFF2-40B4-BE49-F238E27FC236}">
-                <a16:creationId xmlns:a16="http://schemas.microsoft.com/office/drawing/2014/main" id="{58ADBB22-A3CD-4615-BC63-0C94E8708ABF}"/>
+                <a16:creationId xmlns:a16="http://schemas.microsoft.com/office/drawing/2014/main" id="{FCD5C205-0802-431C-AE94-4D52081A0BC8}"/>
               </a:ext>
             </a:extLst>
           </p:cNvPr>
@@ -4140,7 +4140,7 @@
           <p:cNvPr id="18" name="">
             <a:extLst xmlns:a="http://schemas.openxmlformats.org/drawingml/2006/main">
               <a:ext uri="{FF2B5EF4-FFF2-40B4-BE49-F238E27FC236}">
-                <a16:creationId xmlns:a16="http://schemas.microsoft.com/office/drawing/2014/main" id="{3CE3323F-E9D6-439C-B06A-C2EE8E53DE18}"/>
+                <a16:creationId xmlns:a16="http://schemas.microsoft.com/office/drawing/2014/main" id="{4B5CE784-24ED-4DD0-953B-DF8B7E34AD97}"/>
               </a:ext>
             </a:extLst>
           </p:cNvPr>
@@ -4195,7 +4195,7 @@
     </p:spTree>
     <p:extLst>
       <p:ext uri="{BB962C8B-B14F-4D97-AF65-F5344CB8AC3E}">
-        <p14:creationId xmlns:p14="http://schemas.microsoft.com/office/powerpoint/2010/main" val="35178579"/>
+        <p14:creationId xmlns:p14="http://schemas.microsoft.com/office/powerpoint/2010/main" val="85625895"/>
       </p:ext>
     </p:extLst>
   </p:cSld>
@@ -4350,7 +4350,7 @@
           <p:cNvPr id="23" name="">
             <a:extLst xmlns:a="http://schemas.openxmlformats.org/drawingml/2006/main">
               <a:ext uri="{FF2B5EF4-FFF2-40B4-BE49-F238E27FC236}">
-                <a16:creationId xmlns:a16="http://schemas.microsoft.com/office/drawing/2014/main" id="{7D90680F-198F-4193-A4AD-CBD38A4C41CA}"/>
+                <a16:creationId xmlns:a16="http://schemas.microsoft.com/office/drawing/2014/main" id="{93EC4CF0-1B32-4E03-B128-AC0E8C81F74B}"/>
               </a:ext>
             </a:extLst>
           </p:cNvPr>
@@ -4382,7 +4382,7 @@
           <p:cNvPr id="2" name="">
             <a:extLst xmlns:a="http://schemas.openxmlformats.org/drawingml/2006/main">
               <a:ext uri="{FF2B5EF4-FFF2-40B4-BE49-F238E27FC236}">
-                <a16:creationId xmlns:a16="http://schemas.microsoft.com/office/drawing/2014/main" id="{2A213D82-90C9-4043-B317-D9C2205A3906}"/>
+                <a16:creationId xmlns:a16="http://schemas.microsoft.com/office/drawing/2014/main" id="{4EEA819D-36E6-4E0C-B443-E66C1F7C149E}"/>
               </a:ext>
             </a:extLst>
           </p:cNvPr>
@@ -4439,7 +4439,7 @@
           <p:cNvPr id="3" name="">
             <a:extLst xmlns:a="http://schemas.openxmlformats.org/drawingml/2006/main">
               <a:ext uri="{FF2B5EF4-FFF2-40B4-BE49-F238E27FC236}">
-                <a16:creationId xmlns:a16="http://schemas.microsoft.com/office/drawing/2014/main" id="{BF5C7CF9-F8AC-403A-BD50-C2403DFC637B}"/>
+                <a16:creationId xmlns:a16="http://schemas.microsoft.com/office/drawing/2014/main" id="{C37E96D8-5E33-425C-AB19-2E6C9F9E8536}"/>
               </a:ext>
             </a:extLst>
           </p:cNvPr>
@@ -4471,7 +4471,7 @@
           <p:cNvPr id="4" name="">
             <a:extLst xmlns:a="http://schemas.openxmlformats.org/drawingml/2006/main">
               <a:ext uri="{FF2B5EF4-FFF2-40B4-BE49-F238E27FC236}">
-                <a16:creationId xmlns:a16="http://schemas.microsoft.com/office/drawing/2014/main" id="{ACE22093-B31B-4156-A77A-00405F6E2A9C}"/>
+                <a16:creationId xmlns:a16="http://schemas.microsoft.com/office/drawing/2014/main" id="{3DC9A82A-6156-4171-A03D-61C2A1EB85F8}"/>
               </a:ext>
             </a:extLst>
           </p:cNvPr>
@@ -4528,7 +4528,7 @@
           <p:cNvPr id="5" name="">
             <a:extLst xmlns:a="http://schemas.openxmlformats.org/drawingml/2006/main">
               <a:ext uri="{FF2B5EF4-FFF2-40B4-BE49-F238E27FC236}">
-                <a16:creationId xmlns:a16="http://schemas.microsoft.com/office/drawing/2014/main" id="{3DAD0991-691C-4722-8692-557B9007DF7F}"/>
+                <a16:creationId xmlns:a16="http://schemas.microsoft.com/office/drawing/2014/main" id="{4573DB40-0661-4115-88AB-A2B933D06F8D}"/>
               </a:ext>
             </a:extLst>
           </p:cNvPr>
@@ -4585,7 +4585,7 @@
           <p:cNvPr id="6" name="">
             <a:extLst xmlns:a="http://schemas.openxmlformats.org/drawingml/2006/main">
               <a:ext uri="{FF2B5EF4-FFF2-40B4-BE49-F238E27FC236}">
-                <a16:creationId xmlns:a16="http://schemas.microsoft.com/office/drawing/2014/main" id="{1B4DBC2B-2D4A-4969-950A-2EEDEF713830}"/>
+                <a16:creationId xmlns:a16="http://schemas.microsoft.com/office/drawing/2014/main" id="{CDC08EF7-E53A-4870-ADED-1145BC6B63CF}"/>
               </a:ext>
             </a:extLst>
           </p:cNvPr>
@@ -4642,7 +4642,7 @@
           <p:cNvPr id="7" name="">
             <a:extLst xmlns:a="http://schemas.openxmlformats.org/drawingml/2006/main">
               <a:ext uri="{FF2B5EF4-FFF2-40B4-BE49-F238E27FC236}">
-                <a16:creationId xmlns:a16="http://schemas.microsoft.com/office/drawing/2014/main" id="{62E21CAF-4440-44C9-B570-817A837705CB}"/>
+                <a16:creationId xmlns:a16="http://schemas.microsoft.com/office/drawing/2014/main" id="{75B9485B-0537-4DB2-94E3-E9AB73B91CFE}"/>
               </a:ext>
             </a:extLst>
           </p:cNvPr>
@@ -4674,7 +4674,7 @@
           <p:cNvPr id="8" name="">
             <a:extLst xmlns:a="http://schemas.openxmlformats.org/drawingml/2006/main">
               <a:ext uri="{FF2B5EF4-FFF2-40B4-BE49-F238E27FC236}">
-                <a16:creationId xmlns:a16="http://schemas.microsoft.com/office/drawing/2014/main" id="{91DA283F-A483-47C8-B18C-F09F956524C8}"/>
+                <a16:creationId xmlns:a16="http://schemas.microsoft.com/office/drawing/2014/main" id="{0F33FDAC-6727-480A-AAEE-2938E1CE5917}"/>
               </a:ext>
             </a:extLst>
           </p:cNvPr>
@@ -4731,7 +4731,7 @@
           <p:cNvPr id="9" name="">
             <a:extLst xmlns:a="http://schemas.openxmlformats.org/drawingml/2006/main">
               <a:ext uri="{FF2B5EF4-FFF2-40B4-BE49-F238E27FC236}">
-                <a16:creationId xmlns:a16="http://schemas.microsoft.com/office/drawing/2014/main" id="{A09DE854-5157-4FA6-AE83-364F8DD256BD}"/>
+                <a16:creationId xmlns:a16="http://schemas.microsoft.com/office/drawing/2014/main" id="{6C80F876-BB8C-4C87-BA1D-AA131FBB1D0A}"/>
               </a:ext>
             </a:extLst>
           </p:cNvPr>
@@ -4788,7 +4788,7 @@
           <p:cNvPr id="10" name="">
             <a:extLst xmlns:a="http://schemas.openxmlformats.org/drawingml/2006/main">
               <a:ext uri="{FF2B5EF4-FFF2-40B4-BE49-F238E27FC236}">
-                <a16:creationId xmlns:a16="http://schemas.microsoft.com/office/drawing/2014/main" id="{13BE91AF-8EFA-43F3-BF13-3537C08DCDD5}"/>
+                <a16:creationId xmlns:a16="http://schemas.microsoft.com/office/drawing/2014/main" id="{6F04DB4B-8609-4293-97A1-869927C74902}"/>
               </a:ext>
             </a:extLst>
           </p:cNvPr>
@@ -4822,7 +4822,7 @@
           <p:cNvPr id="11" name="">
             <a:extLst xmlns:a="http://schemas.openxmlformats.org/drawingml/2006/main">
               <a:ext uri="{FF2B5EF4-FFF2-40B4-BE49-F238E27FC236}">
-                <a16:creationId xmlns:a16="http://schemas.microsoft.com/office/drawing/2014/main" id="{BBE70F8B-B3DD-4C10-B832-A310596BBA1C}"/>
+                <a16:creationId xmlns:a16="http://schemas.microsoft.com/office/drawing/2014/main" id="{49D85F01-3345-4051-B494-1209DD135245}"/>
               </a:ext>
             </a:extLst>
           </p:cNvPr>
@@ -4854,7 +4854,7 @@
           <p:cNvPr id="12" name="">
             <a:extLst xmlns:a="http://schemas.openxmlformats.org/drawingml/2006/main">
               <a:ext uri="{FF2B5EF4-FFF2-40B4-BE49-F238E27FC236}">
-                <a16:creationId xmlns:a16="http://schemas.microsoft.com/office/drawing/2014/main" id="{60D52EF3-7EFE-42B8-9195-87110C6F0389}"/>
+                <a16:creationId xmlns:a16="http://schemas.microsoft.com/office/drawing/2014/main" id="{F41F0056-6BBC-442A-B9ED-64F521A24151}"/>
               </a:ext>
             </a:extLst>
           </p:cNvPr>
@@ -4911,7 +4911,7 @@
           <p:cNvPr id="13" name="">
             <a:extLst xmlns:a="http://schemas.openxmlformats.org/drawingml/2006/main">
               <a:ext uri="{FF2B5EF4-FFF2-40B4-BE49-F238E27FC236}">
-                <a16:creationId xmlns:a16="http://schemas.microsoft.com/office/drawing/2014/main" id="{C432A009-060C-4341-BB7C-8E79B7E62C67}"/>
+                <a16:creationId xmlns:a16="http://schemas.microsoft.com/office/drawing/2014/main" id="{BAC08639-3A22-4149-B376-45CEAE988EDF}"/>
               </a:ext>
             </a:extLst>
           </p:cNvPr>
@@ -4968,7 +4968,7 @@
           <p:cNvPr id="14" name="">
             <a:extLst xmlns:a="http://schemas.openxmlformats.org/drawingml/2006/main">
               <a:ext uri="{FF2B5EF4-FFF2-40B4-BE49-F238E27FC236}">
-                <a16:creationId xmlns:a16="http://schemas.microsoft.com/office/drawing/2014/main" id="{C1E9A204-AEF3-4137-9712-54BA3867A5A8}"/>
+                <a16:creationId xmlns:a16="http://schemas.microsoft.com/office/drawing/2014/main" id="{0639F8C5-FB37-499B-B581-54CE476F47CA}"/>
               </a:ext>
             </a:extLst>
           </p:cNvPr>
@@ -5002,7 +5002,7 @@
           <p:cNvPr id="15" name="">
             <a:extLst xmlns:a="http://schemas.openxmlformats.org/drawingml/2006/main">
               <a:ext uri="{FF2B5EF4-FFF2-40B4-BE49-F238E27FC236}">
-                <a16:creationId xmlns:a16="http://schemas.microsoft.com/office/drawing/2014/main" id="{5A2B1635-980C-4F1C-B119-AEDBFF31DBD1}"/>
+                <a16:creationId xmlns:a16="http://schemas.microsoft.com/office/drawing/2014/main" id="{081A2DB5-C8AE-4621-A50F-CEA6860BEBE8}"/>
               </a:ext>
             </a:extLst>
           </p:cNvPr>
@@ -5034,7 +5034,7 @@
           <p:cNvPr id="16" name="">
             <a:extLst xmlns:a="http://schemas.openxmlformats.org/drawingml/2006/main">
               <a:ext uri="{FF2B5EF4-FFF2-40B4-BE49-F238E27FC236}">
-                <a16:creationId xmlns:a16="http://schemas.microsoft.com/office/drawing/2014/main" id="{33D39C8D-258F-4089-B551-399CE0114895}"/>
+                <a16:creationId xmlns:a16="http://schemas.microsoft.com/office/drawing/2014/main" id="{24246953-8EFB-4435-A6E3-C4F1F827A6DA}"/>
               </a:ext>
             </a:extLst>
           </p:cNvPr>
@@ -5091,7 +5091,7 @@
           <p:cNvPr id="17" name="">
             <a:extLst xmlns:a="http://schemas.openxmlformats.org/drawingml/2006/main">
               <a:ext uri="{FF2B5EF4-FFF2-40B4-BE49-F238E27FC236}">
-                <a16:creationId xmlns:a16="http://schemas.microsoft.com/office/drawing/2014/main" id="{C300CB20-B2A1-4C5A-A485-610E8312FA8F}"/>
+                <a16:creationId xmlns:a16="http://schemas.microsoft.com/office/drawing/2014/main" id="{2E4CF530-3D82-49B1-8FFE-475081356A61}"/>
               </a:ext>
             </a:extLst>
           </p:cNvPr>
@@ -5148,7 +5148,7 @@
           <p:cNvPr id="18" name="">
             <a:extLst xmlns:a="http://schemas.openxmlformats.org/drawingml/2006/main">
               <a:ext uri="{FF2B5EF4-FFF2-40B4-BE49-F238E27FC236}">
-                <a16:creationId xmlns:a16="http://schemas.microsoft.com/office/drawing/2014/main" id="{0A2FB4DB-62BE-4691-95D4-363695058DE7}"/>
+                <a16:creationId xmlns:a16="http://schemas.microsoft.com/office/drawing/2014/main" id="{AFB4B1D2-AC20-478B-96B2-AEDED28DFAEA}"/>
               </a:ext>
             </a:extLst>
           </p:cNvPr>
@@ -5182,7 +5182,7 @@
           <p:cNvPr id="19" name="">
             <a:extLst xmlns:a="http://schemas.openxmlformats.org/drawingml/2006/main">
               <a:ext uri="{FF2B5EF4-FFF2-40B4-BE49-F238E27FC236}">
-                <a16:creationId xmlns:a16="http://schemas.microsoft.com/office/drawing/2014/main" id="{7494C1F2-84A8-4528-A064-C72C1CE6C894}"/>
+                <a16:creationId xmlns:a16="http://schemas.microsoft.com/office/drawing/2014/main" id="{92BE0E0C-C8C7-42E8-899A-BD1CC6BED142}"/>
               </a:ext>
             </a:extLst>
           </p:cNvPr>
@@ -5214,7 +5214,7 @@
           <p:cNvPr id="20" name="">
             <a:extLst xmlns:a="http://schemas.openxmlformats.org/drawingml/2006/main">
               <a:ext uri="{FF2B5EF4-FFF2-40B4-BE49-F238E27FC236}">
-                <a16:creationId xmlns:a16="http://schemas.microsoft.com/office/drawing/2014/main" id="{2B6DDB55-F04A-4174-8ABB-AA9F50E5C006}"/>
+                <a16:creationId xmlns:a16="http://schemas.microsoft.com/office/drawing/2014/main" id="{B4A67FD9-982A-42F6-9D8D-E2B25308F8ED}"/>
               </a:ext>
             </a:extLst>
           </p:cNvPr>
@@ -5271,7 +5271,7 @@
           <p:cNvPr id="21" name="">
             <a:extLst xmlns:a="http://schemas.openxmlformats.org/drawingml/2006/main">
               <a:ext uri="{FF2B5EF4-FFF2-40B4-BE49-F238E27FC236}">
-                <a16:creationId xmlns:a16="http://schemas.microsoft.com/office/drawing/2014/main" id="{A135D386-B090-48EA-B37A-3CFCDD10AA09}"/>
+                <a16:creationId xmlns:a16="http://schemas.microsoft.com/office/drawing/2014/main" id="{AA361B6F-F5BD-4A9B-A01B-0D5D8E55D8C5}"/>
               </a:ext>
             </a:extLst>
           </p:cNvPr>
@@ -5328,7 +5328,7 @@
           <p:cNvPr id="22" name="">
             <a:extLst xmlns:a="http://schemas.openxmlformats.org/drawingml/2006/main">
               <a:ext uri="{FF2B5EF4-FFF2-40B4-BE49-F238E27FC236}">
-                <a16:creationId xmlns:a16="http://schemas.microsoft.com/office/drawing/2014/main" id="{4CE4A916-0AE6-4D64-85C9-48D4BBFFA84A}"/>
+                <a16:creationId xmlns:a16="http://schemas.microsoft.com/office/drawing/2014/main" id="{9C39C566-650F-4A3B-8B3B-B1CAB14AC80B}"/>
               </a:ext>
             </a:extLst>
           </p:cNvPr>
@@ -5383,7 +5383,7 @@
     </p:spTree>
     <p:extLst>
       <p:ext uri="{BB962C8B-B14F-4D97-AF65-F5344CB8AC3E}">
-        <p14:creationId xmlns:p14="http://schemas.microsoft.com/office/powerpoint/2010/main" val="1857660923"/>
+        <p14:creationId xmlns:p14="http://schemas.microsoft.com/office/powerpoint/2010/main" val="668908678"/>
       </p:ext>
     </p:extLst>
   </p:cSld>
@@ -5584,7 +5584,7 @@
           <p:cNvPr id="23" name="">
             <a:extLst xmlns:a="http://schemas.openxmlformats.org/drawingml/2006/main">
               <a:ext uri="{FF2B5EF4-FFF2-40B4-BE49-F238E27FC236}">
-                <a16:creationId xmlns:a16="http://schemas.microsoft.com/office/drawing/2014/main" id="{A15A4389-883C-47C2-ADAC-3A064F1FFF14}"/>
+                <a16:creationId xmlns:a16="http://schemas.microsoft.com/office/drawing/2014/main" id="{FD2E3FF1-6A6D-455B-B6B5-1F93C88FBF98}"/>
               </a:ext>
             </a:extLst>
           </p:cNvPr>
@@ -5616,7 +5616,7 @@
           <p:cNvPr id="2" name="">
             <a:extLst xmlns:a="http://schemas.openxmlformats.org/drawingml/2006/main">
               <a:ext uri="{FF2B5EF4-FFF2-40B4-BE49-F238E27FC236}">
-                <a16:creationId xmlns:a16="http://schemas.microsoft.com/office/drawing/2014/main" id="{0F369947-A1D1-44FF-98A8-2B87D3AC2108}"/>
+                <a16:creationId xmlns:a16="http://schemas.microsoft.com/office/drawing/2014/main" id="{F36AEA6A-3FAE-412A-BC36-DE6A30FB3E32}"/>
               </a:ext>
             </a:extLst>
           </p:cNvPr>
@@ -5673,7 +5673,7 @@
           <p:cNvPr id="3" name="">
             <a:extLst xmlns:a="http://schemas.openxmlformats.org/drawingml/2006/main">
               <a:ext uri="{FF2B5EF4-FFF2-40B4-BE49-F238E27FC236}">
-                <a16:creationId xmlns:a16="http://schemas.microsoft.com/office/drawing/2014/main" id="{5D2EE21D-4445-48FC-9C47-0BA66A054D38}"/>
+                <a16:creationId xmlns:a16="http://schemas.microsoft.com/office/drawing/2014/main" id="{5CAFF6C6-9F8C-4085-80EB-4B738614C662}"/>
               </a:ext>
             </a:extLst>
           </p:cNvPr>
@@ -5705,7 +5705,7 @@
           <p:cNvPr id="4" name="">
             <a:extLst xmlns:a="http://schemas.openxmlformats.org/drawingml/2006/main">
               <a:ext uri="{FF2B5EF4-FFF2-40B4-BE49-F238E27FC236}">
-                <a16:creationId xmlns:a16="http://schemas.microsoft.com/office/drawing/2014/main" id="{559B68F3-B3B8-4B78-9833-DCED62CA6579}"/>
+                <a16:creationId xmlns:a16="http://schemas.microsoft.com/office/drawing/2014/main" id="{2A2D8902-71E4-4E0D-8DA8-2291311260D4}"/>
               </a:ext>
             </a:extLst>
           </p:cNvPr>
@@ -5762,7 +5762,7 @@
           <p:cNvPr id="5" name="">
             <a:extLst xmlns:a="http://schemas.openxmlformats.org/drawingml/2006/main">
               <a:ext uri="{FF2B5EF4-FFF2-40B4-BE49-F238E27FC236}">
-                <a16:creationId xmlns:a16="http://schemas.microsoft.com/office/drawing/2014/main" id="{01328B62-4D95-405D-B35A-C60CE1C2C063}"/>
+                <a16:creationId xmlns:a16="http://schemas.microsoft.com/office/drawing/2014/main" id="{44AB1BBF-600D-41FD-9B67-1CEDFA2B247C}"/>
               </a:ext>
             </a:extLst>
           </p:cNvPr>
@@ -5819,7 +5819,7 @@
           <p:cNvPr id="6" name="">
             <a:extLst xmlns:a="http://schemas.openxmlformats.org/drawingml/2006/main">
               <a:ext uri="{FF2B5EF4-FFF2-40B4-BE49-F238E27FC236}">
-                <a16:creationId xmlns:a16="http://schemas.microsoft.com/office/drawing/2014/main" id="{5A49237E-FAAC-4285-BB89-84585DFEF87D}"/>
+                <a16:creationId xmlns:a16="http://schemas.microsoft.com/office/drawing/2014/main" id="{9166C00D-1DC1-4C28-BAE4-B87EA7C7ED8C}"/>
               </a:ext>
             </a:extLst>
           </p:cNvPr>
@@ -5876,7 +5876,7 @@
           <p:cNvPr id="7" name="">
             <a:extLst xmlns:a="http://schemas.openxmlformats.org/drawingml/2006/main">
               <a:ext uri="{FF2B5EF4-FFF2-40B4-BE49-F238E27FC236}">
-                <a16:creationId xmlns:a16="http://schemas.microsoft.com/office/drawing/2014/main" id="{8839D29B-7447-43A1-9563-34F4DEA944BE}"/>
+                <a16:creationId xmlns:a16="http://schemas.microsoft.com/office/drawing/2014/main" id="{7020C3BE-4734-4DDE-9C5C-D347A0D178C4}"/>
               </a:ext>
             </a:extLst>
           </p:cNvPr>
@@ -5908,7 +5908,7 @@
           <p:cNvPr id="8" name="">
             <a:extLst xmlns:a="http://schemas.openxmlformats.org/drawingml/2006/main">
               <a:ext uri="{FF2B5EF4-FFF2-40B4-BE49-F238E27FC236}">
-                <a16:creationId xmlns:a16="http://schemas.microsoft.com/office/drawing/2014/main" id="{AE3FF448-FED3-4D60-ACA1-ADC284DA822D}"/>
+                <a16:creationId xmlns:a16="http://schemas.microsoft.com/office/drawing/2014/main" id="{B3876D0A-06B0-4410-9423-5AFE04D6E54F}"/>
               </a:ext>
             </a:extLst>
           </p:cNvPr>
@@ -5965,7 +5965,7 @@
           <p:cNvPr id="9" name="">
             <a:extLst xmlns:a="http://schemas.openxmlformats.org/drawingml/2006/main">
               <a:ext uri="{FF2B5EF4-FFF2-40B4-BE49-F238E27FC236}">
-                <a16:creationId xmlns:a16="http://schemas.microsoft.com/office/drawing/2014/main" id="{03FFB955-5234-47A0-AEBC-1B09A138447D}"/>
+                <a16:creationId xmlns:a16="http://schemas.microsoft.com/office/drawing/2014/main" id="{67DD050D-1DEE-42B2-80BF-58B3A99954DD}"/>
               </a:ext>
             </a:extLst>
           </p:cNvPr>
@@ -6022,7 +6022,7 @@
           <p:cNvPr id="10" name="">
             <a:extLst xmlns:a="http://schemas.openxmlformats.org/drawingml/2006/main">
               <a:ext uri="{FF2B5EF4-FFF2-40B4-BE49-F238E27FC236}">
-                <a16:creationId xmlns:a16="http://schemas.microsoft.com/office/drawing/2014/main" id="{D2CA788C-11F7-43E3-9AB1-1CB52862D74A}"/>
+                <a16:creationId xmlns:a16="http://schemas.microsoft.com/office/drawing/2014/main" id="{58970424-6E83-46C8-BB50-E47E2FDEC04C}"/>
               </a:ext>
             </a:extLst>
           </p:cNvPr>
@@ -6056,7 +6056,7 @@
           <p:cNvPr id="11" name="">
             <a:extLst xmlns:a="http://schemas.openxmlformats.org/drawingml/2006/main">
               <a:ext uri="{FF2B5EF4-FFF2-40B4-BE49-F238E27FC236}">
-                <a16:creationId xmlns:a16="http://schemas.microsoft.com/office/drawing/2014/main" id="{532E639E-C0B2-4D56-B687-AF0E4DBD6361}"/>
+                <a16:creationId xmlns:a16="http://schemas.microsoft.com/office/drawing/2014/main" id="{2C6E7952-6225-4A75-8015-A6DEFBAF6D67}"/>
               </a:ext>
             </a:extLst>
           </p:cNvPr>
@@ -6088,7 +6088,7 @@
           <p:cNvPr id="12" name="">
             <a:extLst xmlns:a="http://schemas.openxmlformats.org/drawingml/2006/main">
               <a:ext uri="{FF2B5EF4-FFF2-40B4-BE49-F238E27FC236}">
-                <a16:creationId xmlns:a16="http://schemas.microsoft.com/office/drawing/2014/main" id="{1703FF42-F810-4B1C-93B2-45F299B90DDD}"/>
+                <a16:creationId xmlns:a16="http://schemas.microsoft.com/office/drawing/2014/main" id="{5CF5BA8D-215A-4C05-BBE1-13A286A0C62E}"/>
               </a:ext>
             </a:extLst>
           </p:cNvPr>
@@ -6145,7 +6145,7 @@
           <p:cNvPr id="13" name="">
             <a:extLst xmlns:a="http://schemas.openxmlformats.org/drawingml/2006/main">
               <a:ext uri="{FF2B5EF4-FFF2-40B4-BE49-F238E27FC236}">
-                <a16:creationId xmlns:a16="http://schemas.microsoft.com/office/drawing/2014/main" id="{00843148-3176-4485-98DD-B6E5C30A6483}"/>
+                <a16:creationId xmlns:a16="http://schemas.microsoft.com/office/drawing/2014/main" id="{F2CD9AEF-E76C-4DF6-93D2-CF208D596811}"/>
               </a:ext>
             </a:extLst>
           </p:cNvPr>
@@ -6202,7 +6202,7 @@
           <p:cNvPr id="14" name="">
             <a:extLst xmlns:a="http://schemas.openxmlformats.org/drawingml/2006/main">
               <a:ext uri="{FF2B5EF4-FFF2-40B4-BE49-F238E27FC236}">
-                <a16:creationId xmlns:a16="http://schemas.microsoft.com/office/drawing/2014/main" id="{7958A027-0C44-4BD3-AD96-0471F5AB42C8}"/>
+                <a16:creationId xmlns:a16="http://schemas.microsoft.com/office/drawing/2014/main" id="{3E4B1DBA-CCFC-4ED0-BD50-F1DCCDE44AD7}"/>
               </a:ext>
             </a:extLst>
           </p:cNvPr>
@@ -6236,7 +6236,7 @@
           <p:cNvPr id="15" name="">
             <a:extLst xmlns:a="http://schemas.openxmlformats.org/drawingml/2006/main">
               <a:ext uri="{FF2B5EF4-FFF2-40B4-BE49-F238E27FC236}">
-                <a16:creationId xmlns:a16="http://schemas.microsoft.com/office/drawing/2014/main" id="{F7819FEF-94E7-4251-8AE5-B305FBE4CF0F}"/>
+                <a16:creationId xmlns:a16="http://schemas.microsoft.com/office/drawing/2014/main" id="{1751EE81-A79B-4395-AA57-8F4C70FFD4EC}"/>
               </a:ext>
             </a:extLst>
           </p:cNvPr>
@@ -6268,7 +6268,7 @@
           <p:cNvPr id="16" name="">
             <a:extLst xmlns:a="http://schemas.openxmlformats.org/drawingml/2006/main">
               <a:ext uri="{FF2B5EF4-FFF2-40B4-BE49-F238E27FC236}">
-                <a16:creationId xmlns:a16="http://schemas.microsoft.com/office/drawing/2014/main" id="{BFD8276D-082E-4484-BBA5-B4E65D352787}"/>
+                <a16:creationId xmlns:a16="http://schemas.microsoft.com/office/drawing/2014/main" id="{BFEBA0E5-079E-46DC-B1B4-AD963B76A1CB}"/>
               </a:ext>
             </a:extLst>
           </p:cNvPr>
@@ -6325,7 +6325,7 @@
           <p:cNvPr id="17" name="">
             <a:extLst xmlns:a="http://schemas.openxmlformats.org/drawingml/2006/main">
               <a:ext uri="{FF2B5EF4-FFF2-40B4-BE49-F238E27FC236}">
-                <a16:creationId xmlns:a16="http://schemas.microsoft.com/office/drawing/2014/main" id="{480AE90C-FC03-49E2-B818-059A0AD14FE7}"/>
+                <a16:creationId xmlns:a16="http://schemas.microsoft.com/office/drawing/2014/main" id="{110259E2-8112-4975-97AD-457FDB44139C}"/>
               </a:ext>
             </a:extLst>
           </p:cNvPr>
@@ -6382,7 +6382,7 @@
           <p:cNvPr id="18" name="">
             <a:extLst xmlns:a="http://schemas.openxmlformats.org/drawingml/2006/main">
               <a:ext uri="{FF2B5EF4-FFF2-40B4-BE49-F238E27FC236}">
-                <a16:creationId xmlns:a16="http://schemas.microsoft.com/office/drawing/2014/main" id="{450C4862-A22C-4303-B0F8-986FB5CA6C47}"/>
+                <a16:creationId xmlns:a16="http://schemas.microsoft.com/office/drawing/2014/main" id="{72578C4D-C0C7-401D-A47A-C45CD256D76C}"/>
               </a:ext>
             </a:extLst>
           </p:cNvPr>
@@ -6416,7 +6416,7 @@
           <p:cNvPr id="19" name="">
             <a:extLst xmlns:a="http://schemas.openxmlformats.org/drawingml/2006/main">
               <a:ext uri="{FF2B5EF4-FFF2-40B4-BE49-F238E27FC236}">
-                <a16:creationId xmlns:a16="http://schemas.microsoft.com/office/drawing/2014/main" id="{B5E3A164-1857-4768-B3B0-A7BB6B5F136A}"/>
+                <a16:creationId xmlns:a16="http://schemas.microsoft.com/office/drawing/2014/main" id="{5D434936-2FEA-491F-947A-ACD3FC3B0F66}"/>
               </a:ext>
             </a:extLst>
           </p:cNvPr>
@@ -6448,7 +6448,7 @@
           <p:cNvPr id="20" name="">
             <a:extLst xmlns:a="http://schemas.openxmlformats.org/drawingml/2006/main">
               <a:ext uri="{FF2B5EF4-FFF2-40B4-BE49-F238E27FC236}">
-                <a16:creationId xmlns:a16="http://schemas.microsoft.com/office/drawing/2014/main" id="{8436B2E7-BD5B-4512-B0EE-9F7D0043F923}"/>
+                <a16:creationId xmlns:a16="http://schemas.microsoft.com/office/drawing/2014/main" id="{0DC449F8-168B-4269-B60B-89F263AA799F}"/>
               </a:ext>
             </a:extLst>
           </p:cNvPr>
@@ -6505,7 +6505,7 @@
           <p:cNvPr id="21" name="">
             <a:extLst xmlns:a="http://schemas.openxmlformats.org/drawingml/2006/main">
               <a:ext uri="{FF2B5EF4-FFF2-40B4-BE49-F238E27FC236}">
-                <a16:creationId xmlns:a16="http://schemas.microsoft.com/office/drawing/2014/main" id="{BFA6F7D9-F68A-462B-BEE0-8C3A9577C69D}"/>
+                <a16:creationId xmlns:a16="http://schemas.microsoft.com/office/drawing/2014/main" id="{D81124E9-0C28-4CBA-AE93-0FE670C964CA}"/>
               </a:ext>
             </a:extLst>
           </p:cNvPr>
@@ -6562,7 +6562,7 @@
           <p:cNvPr id="22" name="">
             <a:extLst xmlns:a="http://schemas.openxmlformats.org/drawingml/2006/main">
               <a:ext uri="{FF2B5EF4-FFF2-40B4-BE49-F238E27FC236}">
-                <a16:creationId xmlns:a16="http://schemas.microsoft.com/office/drawing/2014/main" id="{35836266-70C0-41C9-8B91-717657EB0892}"/>
+                <a16:creationId xmlns:a16="http://schemas.microsoft.com/office/drawing/2014/main" id="{B6EB9565-3BC0-4234-B6A4-C11FAA6EF1D7}"/>
               </a:ext>
             </a:extLst>
           </p:cNvPr>
@@ -6617,7 +6617,7 @@
     </p:spTree>
     <p:extLst>
       <p:ext uri="{BB962C8B-B14F-4D97-AF65-F5344CB8AC3E}">
-        <p14:creationId xmlns:p14="http://schemas.microsoft.com/office/powerpoint/2010/main" val="36659494"/>
+        <p14:creationId xmlns:p14="http://schemas.microsoft.com/office/powerpoint/2010/main" val="1837738656"/>
       </p:ext>
     </p:extLst>
   </p:cSld>
@@ -6818,7 +6818,7 @@
           <p:cNvPr id="16" name="">
             <a:extLst xmlns:a="http://schemas.openxmlformats.org/drawingml/2006/main">
               <a:ext uri="{FF2B5EF4-FFF2-40B4-BE49-F238E27FC236}">
-                <a16:creationId xmlns:a16="http://schemas.microsoft.com/office/drawing/2014/main" id="{F6525C01-C252-4FE0-957B-3B650F865F6A}"/>
+                <a16:creationId xmlns:a16="http://schemas.microsoft.com/office/drawing/2014/main" id="{80CBE584-9E93-4118-A705-E8FF670ED0BF}"/>
               </a:ext>
             </a:extLst>
           </p:cNvPr>
@@ -6850,7 +6850,7 @@
           <p:cNvPr id="2" name="">
             <a:extLst xmlns:a="http://schemas.openxmlformats.org/drawingml/2006/main">
               <a:ext uri="{FF2B5EF4-FFF2-40B4-BE49-F238E27FC236}">
-                <a16:creationId xmlns:a16="http://schemas.microsoft.com/office/drawing/2014/main" id="{8FE551BD-D3CC-4EC9-914B-A05EA70ACDBC}"/>
+                <a16:creationId xmlns:a16="http://schemas.microsoft.com/office/drawing/2014/main" id="{CBC423D6-8BDA-4902-B3DB-2B9276B5B3D7}"/>
               </a:ext>
             </a:extLst>
           </p:cNvPr>
@@ -6907,7 +6907,7 @@
           <p:cNvPr id="3" name="">
             <a:extLst xmlns:a="http://schemas.openxmlformats.org/drawingml/2006/main">
               <a:ext uri="{FF2B5EF4-FFF2-40B4-BE49-F238E27FC236}">
-                <a16:creationId xmlns:a16="http://schemas.microsoft.com/office/drawing/2014/main" id="{24CAF169-DABA-4451-936F-244D7F4298BF}"/>
+                <a16:creationId xmlns:a16="http://schemas.microsoft.com/office/drawing/2014/main" id="{86000903-4340-4C09-BEA3-8AEDF093332E}"/>
               </a:ext>
             </a:extLst>
           </p:cNvPr>
@@ -6939,7 +6939,7 @@
           <p:cNvPr id="4" name="">
             <a:extLst xmlns:a="http://schemas.openxmlformats.org/drawingml/2006/main">
               <a:ext uri="{FF2B5EF4-FFF2-40B4-BE49-F238E27FC236}">
-                <a16:creationId xmlns:a16="http://schemas.microsoft.com/office/drawing/2014/main" id="{6F825ACF-DCC9-491A-9A15-E54686ECF8F8}"/>
+                <a16:creationId xmlns:a16="http://schemas.microsoft.com/office/drawing/2014/main" id="{8503CACC-F8B9-4596-BC27-6F764AD6758C}"/>
               </a:ext>
             </a:extLst>
           </p:cNvPr>
@@ -6996,7 +6996,7 @@
           <p:cNvPr id="5" name="">
             <a:extLst xmlns:a="http://schemas.openxmlformats.org/drawingml/2006/main">
               <a:ext uri="{FF2B5EF4-FFF2-40B4-BE49-F238E27FC236}">
-                <a16:creationId xmlns:a16="http://schemas.microsoft.com/office/drawing/2014/main" id="{F2CB68BB-3749-4AC0-BBFD-00A0EC621FC6}"/>
+                <a16:creationId xmlns:a16="http://schemas.microsoft.com/office/drawing/2014/main" id="{5787E516-549A-4BF7-9D11-E11C6F64405F}"/>
               </a:ext>
             </a:extLst>
           </p:cNvPr>
@@ -7053,7 +7053,7 @@
           <p:cNvPr id="6" name="">
             <a:extLst xmlns:a="http://schemas.openxmlformats.org/drawingml/2006/main">
               <a:ext uri="{FF2B5EF4-FFF2-40B4-BE49-F238E27FC236}">
-                <a16:creationId xmlns:a16="http://schemas.microsoft.com/office/drawing/2014/main" id="{0C3CBF70-FB9D-4D9D-9845-504F20E7884B}"/>
+                <a16:creationId xmlns:a16="http://schemas.microsoft.com/office/drawing/2014/main" id="{B0F50BF2-186C-4329-A627-10C3167DA632}"/>
               </a:ext>
             </a:extLst>
           </p:cNvPr>
@@ -7110,7 +7110,7 @@
           <p:cNvPr id="7" name="">
             <a:extLst xmlns:a="http://schemas.openxmlformats.org/drawingml/2006/main">
               <a:ext uri="{FF2B5EF4-FFF2-40B4-BE49-F238E27FC236}">
-                <a16:creationId xmlns:a16="http://schemas.microsoft.com/office/drawing/2014/main" id="{4CF3596D-9BA6-4D22-BB85-CB679C098352}"/>
+                <a16:creationId xmlns:a16="http://schemas.microsoft.com/office/drawing/2014/main" id="{F84735E7-2D6C-4405-8C55-F85857C9C0A5}"/>
               </a:ext>
             </a:extLst>
           </p:cNvPr>
@@ -7142,7 +7142,7 @@
           <p:cNvPr id="8" name="">
             <a:extLst xmlns:a="http://schemas.openxmlformats.org/drawingml/2006/main">
               <a:ext uri="{FF2B5EF4-FFF2-40B4-BE49-F238E27FC236}">
-                <a16:creationId xmlns:a16="http://schemas.microsoft.com/office/drawing/2014/main" id="{BB49F863-A353-4E96-AD9C-16224F0C36D9}"/>
+                <a16:creationId xmlns:a16="http://schemas.microsoft.com/office/drawing/2014/main" id="{AA563EE7-289A-42DF-8862-D7513930C911}"/>
               </a:ext>
             </a:extLst>
           </p:cNvPr>
@@ -7199,7 +7199,7 @@
           <p:cNvPr id="9" name="">
             <a:extLst xmlns:a="http://schemas.openxmlformats.org/drawingml/2006/main">
               <a:ext uri="{FF2B5EF4-FFF2-40B4-BE49-F238E27FC236}">
-                <a16:creationId xmlns:a16="http://schemas.microsoft.com/office/drawing/2014/main" id="{83C209B9-53A0-4D4F-9514-3A953EC1DCEB}"/>
+                <a16:creationId xmlns:a16="http://schemas.microsoft.com/office/drawing/2014/main" id="{96AB6FB5-674D-458C-9F5B-97A988C17BB6}"/>
               </a:ext>
             </a:extLst>
           </p:cNvPr>
@@ -7256,7 +7256,7 @@
           <p:cNvPr id="10" name="">
             <a:extLst xmlns:a="http://schemas.openxmlformats.org/drawingml/2006/main">
               <a:ext uri="{FF2B5EF4-FFF2-40B4-BE49-F238E27FC236}">
-                <a16:creationId xmlns:a16="http://schemas.microsoft.com/office/drawing/2014/main" id="{597ED4DC-9D2D-4AAD-8D00-16F8FCAA4ECD}"/>
+                <a16:creationId xmlns:a16="http://schemas.microsoft.com/office/drawing/2014/main" id="{469BB162-1B85-4E95-A74E-6083E759E37B}"/>
               </a:ext>
             </a:extLst>
           </p:cNvPr>
@@ -7313,7 +7313,7 @@
           <p:cNvPr id="11" name="">
             <a:extLst xmlns:a="http://schemas.openxmlformats.org/drawingml/2006/main">
               <a:ext uri="{FF2B5EF4-FFF2-40B4-BE49-F238E27FC236}">
-                <a16:creationId xmlns:a16="http://schemas.microsoft.com/office/drawing/2014/main" id="{F618B848-ED20-476D-8F73-4D075B68D0AA}"/>
+                <a16:creationId xmlns:a16="http://schemas.microsoft.com/office/drawing/2014/main" id="{B968ABE2-8340-43C5-BCBD-C3BE265008C5}"/>
               </a:ext>
             </a:extLst>
           </p:cNvPr>
@@ -7345,7 +7345,7 @@
           <p:cNvPr id="12" name="">
             <a:extLst xmlns:a="http://schemas.openxmlformats.org/drawingml/2006/main">
               <a:ext uri="{FF2B5EF4-FFF2-40B4-BE49-F238E27FC236}">
-                <a16:creationId xmlns:a16="http://schemas.microsoft.com/office/drawing/2014/main" id="{3EE6E873-8C0D-4283-9A56-4802AC40A28C}"/>
+                <a16:creationId xmlns:a16="http://schemas.microsoft.com/office/drawing/2014/main" id="{AEFAD842-5BD8-4067-ABD3-A00ED0DA11DD}"/>
               </a:ext>
             </a:extLst>
           </p:cNvPr>
@@ -7402,7 +7402,7 @@
           <p:cNvPr id="13" name="">
             <a:extLst xmlns:a="http://schemas.openxmlformats.org/drawingml/2006/main">
               <a:ext uri="{FF2B5EF4-FFF2-40B4-BE49-F238E27FC236}">
-                <a16:creationId xmlns:a16="http://schemas.microsoft.com/office/drawing/2014/main" id="{B6E85854-426C-492F-923A-23CB487EC48C}"/>
+                <a16:creationId xmlns:a16="http://schemas.microsoft.com/office/drawing/2014/main" id="{7A9D64E8-0627-4075-AFCA-49F080B664E5}"/>
               </a:ext>
             </a:extLst>
           </p:cNvPr>
@@ -7459,7 +7459,7 @@
           <p:cNvPr id="14" name="">
             <a:extLst xmlns:a="http://schemas.openxmlformats.org/drawingml/2006/main">
               <a:ext uri="{FF2B5EF4-FFF2-40B4-BE49-F238E27FC236}">
-                <a16:creationId xmlns:a16="http://schemas.microsoft.com/office/drawing/2014/main" id="{0C649251-3C71-46BC-9EFA-5B16189AE154}"/>
+                <a16:creationId xmlns:a16="http://schemas.microsoft.com/office/drawing/2014/main" id="{8DD168E4-2759-465C-ADB4-6C31E92B8A45}"/>
               </a:ext>
             </a:extLst>
           </p:cNvPr>
@@ -7516,7 +7516,7 @@
           <p:cNvPr id="15" name="">
             <a:extLst xmlns:a="http://schemas.openxmlformats.org/drawingml/2006/main">
               <a:ext uri="{FF2B5EF4-FFF2-40B4-BE49-F238E27FC236}">
-                <a16:creationId xmlns:a16="http://schemas.microsoft.com/office/drawing/2014/main" id="{F7F1B2CE-E450-47A5-BEB3-2CAFA81C0A51}"/>
+                <a16:creationId xmlns:a16="http://schemas.microsoft.com/office/drawing/2014/main" id="{5F90DB5F-9701-40AA-8824-7CB3667473D9}"/>
               </a:ext>
             </a:extLst>
           </p:cNvPr>
@@ -7571,7 +7571,7 @@
     </p:spTree>
     <p:extLst>
       <p:ext uri="{BB962C8B-B14F-4D97-AF65-F5344CB8AC3E}">
-        <p14:creationId xmlns:p14="http://schemas.microsoft.com/office/powerpoint/2010/main" val="1406272597"/>
+        <p14:creationId xmlns:p14="http://schemas.microsoft.com/office/powerpoint/2010/main" val="1765218866"/>
       </p:ext>
     </p:extLst>
   </p:cSld>
@@ -7772,7 +7772,7 @@
           <p:cNvPr id="23" name="">
             <a:extLst xmlns:a="http://schemas.openxmlformats.org/drawingml/2006/main">
               <a:ext uri="{FF2B5EF4-FFF2-40B4-BE49-F238E27FC236}">
-                <a16:creationId xmlns:a16="http://schemas.microsoft.com/office/drawing/2014/main" id="{46A40825-9EC2-4601-B6AF-96991F08B685}"/>
+                <a16:creationId xmlns:a16="http://schemas.microsoft.com/office/drawing/2014/main" id="{03E59051-34C3-4DBB-B1F2-34CEC4E9645A}"/>
               </a:ext>
             </a:extLst>
           </p:cNvPr>
@@ -7804,7 +7804,7 @@
           <p:cNvPr id="2" name="">
             <a:extLst xmlns:a="http://schemas.openxmlformats.org/drawingml/2006/main">
               <a:ext uri="{FF2B5EF4-FFF2-40B4-BE49-F238E27FC236}">
-                <a16:creationId xmlns:a16="http://schemas.microsoft.com/office/drawing/2014/main" id="{14BD34A5-B671-4D5D-A6B7-1D03E25EE468}"/>
+                <a16:creationId xmlns:a16="http://schemas.microsoft.com/office/drawing/2014/main" id="{70960E7A-C020-4782-90AA-6CB8FB2E5EC1}"/>
               </a:ext>
             </a:extLst>
           </p:cNvPr>
@@ -7861,7 +7861,7 @@
           <p:cNvPr id="3" name="">
             <a:extLst xmlns:a="http://schemas.openxmlformats.org/drawingml/2006/main">
               <a:ext uri="{FF2B5EF4-FFF2-40B4-BE49-F238E27FC236}">
-                <a16:creationId xmlns:a16="http://schemas.microsoft.com/office/drawing/2014/main" id="{7063BE26-9245-481B-9F53-F89D001EB161}"/>
+                <a16:creationId xmlns:a16="http://schemas.microsoft.com/office/drawing/2014/main" id="{CD32E48F-0273-4206-8538-4CCED5845EA3}"/>
               </a:ext>
             </a:extLst>
           </p:cNvPr>
@@ -7893,7 +7893,7 @@
           <p:cNvPr id="4" name="">
             <a:extLst xmlns:a="http://schemas.openxmlformats.org/drawingml/2006/main">
               <a:ext uri="{FF2B5EF4-FFF2-40B4-BE49-F238E27FC236}">
-                <a16:creationId xmlns:a16="http://schemas.microsoft.com/office/drawing/2014/main" id="{C97EC0C4-572C-4BBE-AA7E-79F01D66025F}"/>
+                <a16:creationId xmlns:a16="http://schemas.microsoft.com/office/drawing/2014/main" id="{C8F0930A-8687-4D49-B0CC-4D99EB0993C0}"/>
               </a:ext>
             </a:extLst>
           </p:cNvPr>
@@ -7950,7 +7950,7 @@
           <p:cNvPr id="5" name="">
             <a:extLst xmlns:a="http://schemas.openxmlformats.org/drawingml/2006/main">
               <a:ext uri="{FF2B5EF4-FFF2-40B4-BE49-F238E27FC236}">
-                <a16:creationId xmlns:a16="http://schemas.microsoft.com/office/drawing/2014/main" id="{A98A6D32-BCE0-4FD3-8366-855BB885C6D2}"/>
+                <a16:creationId xmlns:a16="http://schemas.microsoft.com/office/drawing/2014/main" id="{D006FBA2-5BEF-43D5-ACFF-913461E7F975}"/>
               </a:ext>
             </a:extLst>
           </p:cNvPr>
@@ -8007,7 +8007,7 @@
           <p:cNvPr id="6" name="">
             <a:extLst xmlns:a="http://schemas.openxmlformats.org/drawingml/2006/main">
               <a:ext uri="{FF2B5EF4-FFF2-40B4-BE49-F238E27FC236}">
-                <a16:creationId xmlns:a16="http://schemas.microsoft.com/office/drawing/2014/main" id="{E0E417B1-A4B0-4052-A9F9-93E3FDB073E2}"/>
+                <a16:creationId xmlns:a16="http://schemas.microsoft.com/office/drawing/2014/main" id="{999F34AA-2977-4E01-974C-B3E48D88130E}"/>
               </a:ext>
             </a:extLst>
           </p:cNvPr>
@@ -8064,7 +8064,7 @@
           <p:cNvPr id="7" name="">
             <a:extLst xmlns:a="http://schemas.openxmlformats.org/drawingml/2006/main">
               <a:ext uri="{FF2B5EF4-FFF2-40B4-BE49-F238E27FC236}">
-                <a16:creationId xmlns:a16="http://schemas.microsoft.com/office/drawing/2014/main" id="{CF5EEDE4-711C-47B1-BED0-31D707623336}"/>
+                <a16:creationId xmlns:a16="http://schemas.microsoft.com/office/drawing/2014/main" id="{C11037B9-2D40-484F-AF95-A67775FAAC58}"/>
               </a:ext>
             </a:extLst>
           </p:cNvPr>
@@ -8096,7 +8096,7 @@
           <p:cNvPr id="8" name="">
             <a:extLst xmlns:a="http://schemas.openxmlformats.org/drawingml/2006/main">
               <a:ext uri="{FF2B5EF4-FFF2-40B4-BE49-F238E27FC236}">
-                <a16:creationId xmlns:a16="http://schemas.microsoft.com/office/drawing/2014/main" id="{4D30E8A6-F8E1-4E60-838D-0F1934915E85}"/>
+                <a16:creationId xmlns:a16="http://schemas.microsoft.com/office/drawing/2014/main" id="{5854572A-E651-47CE-AA8E-FDF494754278}"/>
               </a:ext>
             </a:extLst>
           </p:cNvPr>
@@ -8153,7 +8153,7 @@
           <p:cNvPr id="9" name="">
             <a:extLst xmlns:a="http://schemas.openxmlformats.org/drawingml/2006/main">
               <a:ext uri="{FF2B5EF4-FFF2-40B4-BE49-F238E27FC236}">
-                <a16:creationId xmlns:a16="http://schemas.microsoft.com/office/drawing/2014/main" id="{18B060B4-C44D-4485-85DF-4352E37F4641}"/>
+                <a16:creationId xmlns:a16="http://schemas.microsoft.com/office/drawing/2014/main" id="{40BC44AF-5395-49C2-8749-A131FD0E8C37}"/>
               </a:ext>
             </a:extLst>
           </p:cNvPr>
@@ -8210,19 +8210,19 @@
           <p:cNvPr id="10" name="">
             <a:extLst xmlns:a="http://schemas.openxmlformats.org/drawingml/2006/main">
               <a:ext uri="{FF2B5EF4-FFF2-40B4-BE49-F238E27FC236}">
-                <a16:creationId xmlns:a16="http://schemas.microsoft.com/office/drawing/2014/main" id="{DDEC0733-0008-4C2E-84F6-5DDED2AA4180}"/>
-              </a:ext>
-            </a:extLst>
-          </p:cNvPr>
-          <p:cNvSpPr>
-            <a:spLocks xmlns:a="http://schemas.openxmlformats.org/drawingml/2006/main" noGrp="1"/>
-          </p:cNvSpPr>
-          <p:nvPr/>
-        </p:nvSpPr>
-        <p:spPr>
-          <a:xfrm xmlns:a="http://schemas.openxmlformats.org/drawingml/2006/main">
-            <a:off x="914400" y="1257300"/>
-            <a:ext cx="10363200" cy="781050"/>
+                <a16:creationId xmlns:a16="http://schemas.microsoft.com/office/drawing/2014/main" id="{790A4F3E-1403-45D8-82F1-61682C5D56A8}"/>
+              </a:ext>
+            </a:extLst>
+          </p:cNvPr>
+          <p:cNvSpPr>
+            <a:spLocks xmlns:a="http://schemas.openxmlformats.org/drawingml/2006/main" noGrp="1"/>
+          </p:cNvSpPr>
+          <p:nvPr/>
+        </p:nvSpPr>
+        <p:spPr>
+          <a:xfrm xmlns:a="http://schemas.openxmlformats.org/drawingml/2006/main">
+            <a:off x="857250" y="1219200"/>
+            <a:ext cx="10477500" cy="742950"/>
           </a:xfrm>
           <a:prstGeom xmlns:a="http://schemas.openxmlformats.org/drawingml/2006/main" prst="rect">
             <a:avLst/>
@@ -8239,7 +8239,7 @@
           <a:lstStyle xmlns:a="http://schemas.openxmlformats.org/drawingml/2006/main"/>
           <a:p xmlns:a="http://schemas.openxmlformats.org/drawingml/2006/main">
             <a:pPr algn="ctr">
-              <a:defRPr sz="2175" b="1">
+              <a:defRPr sz="2100" b="1">
                 <a:solidFill>
                   <a:srgbClr val="17253A"/>
                 </a:solidFill>
@@ -8249,7 +8249,7 @@
               </a:defRPr>
             </a:pPr>
             <a:r>
-              <a:rPr sz="2175" b="1">
+              <a:rPr sz="2100" b="1">
                 <a:solidFill>
                   <a:srgbClr val="17253A"/>
                 </a:solidFill>
@@ -8267,28 +8267,30 @@
           <p:cNvPr id="11" name="">
             <a:extLst xmlns:a="http://schemas.openxmlformats.org/drawingml/2006/main">
               <a:ext uri="{FF2B5EF4-FFF2-40B4-BE49-F238E27FC236}">
-                <a16:creationId xmlns:a16="http://schemas.microsoft.com/office/drawing/2014/main" id="{87960344-1557-49B7-BA00-AD3E57356CF3}"/>
-              </a:ext>
-            </a:extLst>
-          </p:cNvPr>
-          <p:cNvSpPr>
-            <a:spLocks xmlns:a="http://schemas.openxmlformats.org/drawingml/2006/main" noGrp="1"/>
-          </p:cNvSpPr>
-          <p:nvPr/>
-        </p:nvSpPr>
-        <p:spPr>
-          <a:xfrm xmlns:a="http://schemas.openxmlformats.org/drawingml/2006/main">
-            <a:off x="1000125" y="2247900"/>
-            <a:ext cx="476250" cy="476250"/>
-          </a:xfrm>
-          <a:prstGeom xmlns:a="http://schemas.openxmlformats.org/drawingml/2006/main" prst="ellipse">
+                <a16:creationId xmlns:a16="http://schemas.microsoft.com/office/drawing/2014/main" id="{5A9E2F98-EFFB-4A5F-8025-3FA21FAF6626}"/>
+              </a:ext>
+            </a:extLst>
+          </p:cNvPr>
+          <p:cNvSpPr>
+            <a:spLocks xmlns:a="http://schemas.openxmlformats.org/drawingml/2006/main" noGrp="1"/>
+          </p:cNvSpPr>
+          <p:nvPr/>
+        </p:nvSpPr>
+        <p:spPr>
+          <a:xfrm xmlns:a="http://schemas.openxmlformats.org/drawingml/2006/main">
+            <a:off x="971550" y="2124075"/>
+            <a:ext cx="38100" cy="3524250"/>
+          </a:xfrm>
+          <a:prstGeom xmlns:a="http://schemas.openxmlformats.org/drawingml/2006/main" prst="rect">
             <a:avLst/>
           </a:prstGeom>
           <a:solidFill xmlns:a="http://schemas.openxmlformats.org/drawingml/2006/main">
-            <a:srgbClr val="18324A"/>
+            <a:srgbClr val="2C6E73"/>
           </a:solidFill>
           <a:ln xmlns:a="http://schemas.openxmlformats.org/drawingml/2006/main" w="0">
-            <a:noFill/>
+            <a:solidFill>
+              <a:srgbClr val="2C6E73"/>
+            </a:solidFill>
           </a:ln>
         </p:spPr>
       </p:sp>
@@ -8297,19 +8299,19 @@
           <p:cNvPr id="12" name="">
             <a:extLst xmlns:a="http://schemas.openxmlformats.org/drawingml/2006/main">
               <a:ext uri="{FF2B5EF4-FFF2-40B4-BE49-F238E27FC236}">
-                <a16:creationId xmlns:a16="http://schemas.microsoft.com/office/drawing/2014/main" id="{B6CFC88E-A38E-4089-B61A-ADC84DD8F9EF}"/>
-              </a:ext>
-            </a:extLst>
-          </p:cNvPr>
-          <p:cNvSpPr>
-            <a:spLocks xmlns:a="http://schemas.openxmlformats.org/drawingml/2006/main" noGrp="1"/>
-          </p:cNvSpPr>
-          <p:nvPr/>
-        </p:nvSpPr>
-        <p:spPr>
-          <a:xfrm xmlns:a="http://schemas.openxmlformats.org/drawingml/2006/main">
-            <a:off x="1000125" y="2276475"/>
-            <a:ext cx="476250" cy="419100"/>
+                <a16:creationId xmlns:a16="http://schemas.microsoft.com/office/drawing/2014/main" id="{33AB5995-D514-455C-9E2D-84AF45CE1C54}"/>
+              </a:ext>
+            </a:extLst>
+          </p:cNvPr>
+          <p:cNvSpPr>
+            <a:spLocks xmlns:a="http://schemas.openxmlformats.org/drawingml/2006/main" noGrp="1"/>
+          </p:cNvSpPr>
+          <p:nvPr/>
+        </p:nvSpPr>
+        <p:spPr>
+          <a:xfrm xmlns:a="http://schemas.openxmlformats.org/drawingml/2006/main">
+            <a:off x="1162050" y="2200275"/>
+            <a:ext cx="400050" cy="400050"/>
           </a:xfrm>
           <a:prstGeom xmlns:a="http://schemas.openxmlformats.org/drawingml/2006/main" prst="rect">
             <a:avLst/>
@@ -8326,9 +8328,9 @@
           <a:lstStyle xmlns:a="http://schemas.openxmlformats.org/drawingml/2006/main"/>
           <a:p xmlns:a="http://schemas.openxmlformats.org/drawingml/2006/main">
             <a:pPr algn="ctr">
-              <a:defRPr sz="1350" b="1">
-                <a:solidFill>
-                  <a:srgbClr val="FFFFFF"/>
+              <a:defRPr sz="1125" b="1">
+                <a:solidFill>
+                  <a:srgbClr val="2C6E73"/>
                 </a:solidFill>
                 <a:latin typeface="Arial"/>
                 <a:ea typeface="Arial"/>
@@ -8336,9 +8338,9 @@
               </a:defRPr>
             </a:pPr>
             <a:r>
-              <a:rPr sz="1350" b="1">
-                <a:solidFill>
-                  <a:srgbClr val="FFFFFF"/>
+              <a:rPr sz="1125" b="1">
+                <a:solidFill>
+                  <a:srgbClr val="2C6E73"/>
                 </a:solidFill>
                 <a:latin typeface="Arial"/>
                 <a:ea typeface="Arial"/>
@@ -8354,19 +8356,19 @@
           <p:cNvPr id="13" name="">
             <a:extLst xmlns:a="http://schemas.openxmlformats.org/drawingml/2006/main">
               <a:ext uri="{FF2B5EF4-FFF2-40B4-BE49-F238E27FC236}">
-                <a16:creationId xmlns:a16="http://schemas.microsoft.com/office/drawing/2014/main" id="{185045DC-E82F-4A66-AEC5-B54CD25EE5BF}"/>
-              </a:ext>
-            </a:extLst>
-          </p:cNvPr>
-          <p:cNvSpPr>
-            <a:spLocks xmlns:a="http://schemas.openxmlformats.org/drawingml/2006/main" noGrp="1"/>
-          </p:cNvSpPr>
-          <p:nvPr/>
-        </p:nvSpPr>
-        <p:spPr>
-          <a:xfrm xmlns:a="http://schemas.openxmlformats.org/drawingml/2006/main">
-            <a:off x="1714500" y="2181225"/>
-            <a:ext cx="9429750" cy="609600"/>
+                <a16:creationId xmlns:a16="http://schemas.microsoft.com/office/drawing/2014/main" id="{24033D44-3557-4C7E-AE0B-438FD74547A3}"/>
+              </a:ext>
+            </a:extLst>
+          </p:cNvPr>
+          <p:cNvSpPr>
+            <a:spLocks xmlns:a="http://schemas.openxmlformats.org/drawingml/2006/main" noGrp="1"/>
+          </p:cNvSpPr>
+          <p:nvPr/>
+        </p:nvSpPr>
+        <p:spPr>
+          <a:xfrm xmlns:a="http://schemas.openxmlformats.org/drawingml/2006/main">
+            <a:off x="1714500" y="2114550"/>
+            <a:ext cx="9525000" cy="809625"/>
           </a:xfrm>
           <a:prstGeom xmlns:a="http://schemas.openxmlformats.org/drawingml/2006/main" prst="rect">
             <a:avLst/>
@@ -8383,7 +8385,7 @@
           <a:lstStyle xmlns:a="http://schemas.openxmlformats.org/drawingml/2006/main"/>
           <a:p xmlns:a="http://schemas.openxmlformats.org/drawingml/2006/main">
             <a:pPr algn="l">
-              <a:defRPr sz="1500" b="0">
+              <a:defRPr sz="1725" b="0">
                 <a:solidFill>
                   <a:srgbClr val="17253A"/>
                 </a:solidFill>
@@ -8393,7 +8395,7 @@
               </a:defRPr>
             </a:pPr>
             <a:r>
-              <a:rPr sz="1500" b="0">
+              <a:rPr sz="1725" b="0">
                 <a:solidFill>
                   <a:srgbClr val="17253A"/>
                 </a:solidFill>
@@ -8401,7 +8403,7 @@
                 <a:ea typeface="Arial"/>
                 <a:cs typeface="Arial"/>
               </a:rPr>
-              <a:t>Identify the structure: Keep both sides balanced and identify the outer operation.</a:t>
+              <a:t>4x + 12 = 40 → 4x = 28 → x = 7</a:t>
             </a:r>
           </a:p>
         </p:txBody>
@@ -8411,28 +8413,30 @@
           <p:cNvPr id="14" name="">
             <a:extLst xmlns:a="http://schemas.openxmlformats.org/drawingml/2006/main">
               <a:ext uri="{FF2B5EF4-FFF2-40B4-BE49-F238E27FC236}">
-                <a16:creationId xmlns:a16="http://schemas.microsoft.com/office/drawing/2014/main" id="{B67BAFD2-78B6-40BF-A077-9C8C31D55C1E}"/>
-              </a:ext>
-            </a:extLst>
-          </p:cNvPr>
-          <p:cNvSpPr>
-            <a:spLocks xmlns:a="http://schemas.openxmlformats.org/drawingml/2006/main" noGrp="1"/>
-          </p:cNvSpPr>
-          <p:nvPr/>
-        </p:nvSpPr>
-        <p:spPr>
-          <a:xfrm xmlns:a="http://schemas.openxmlformats.org/drawingml/2006/main">
-            <a:off x="1000125" y="2990850"/>
-            <a:ext cx="476250" cy="476250"/>
-          </a:xfrm>
-          <a:prstGeom xmlns:a="http://schemas.openxmlformats.org/drawingml/2006/main" prst="ellipse">
+                <a16:creationId xmlns:a16="http://schemas.microsoft.com/office/drawing/2014/main" id="{98E6E97B-42CC-49D8-919A-15C3F10CE865}"/>
+              </a:ext>
+            </a:extLst>
+          </p:cNvPr>
+          <p:cNvSpPr>
+            <a:spLocks xmlns:a="http://schemas.openxmlformats.org/drawingml/2006/main" noGrp="1"/>
+          </p:cNvSpPr>
+          <p:nvPr/>
+        </p:nvSpPr>
+        <p:spPr>
+          <a:xfrm xmlns:a="http://schemas.openxmlformats.org/drawingml/2006/main">
+            <a:off x="1714500" y="2943225"/>
+            <a:ext cx="9334500" cy="9525"/>
+          </a:xfrm>
+          <a:prstGeom xmlns:a="http://schemas.openxmlformats.org/drawingml/2006/main" prst="rect">
             <a:avLst/>
           </a:prstGeom>
           <a:solidFill xmlns:a="http://schemas.openxmlformats.org/drawingml/2006/main">
-            <a:srgbClr val="2C6E73"/>
+            <a:srgbClr val="D9E0E6"/>
           </a:solidFill>
           <a:ln xmlns:a="http://schemas.openxmlformats.org/drawingml/2006/main" w="0">
-            <a:noFill/>
+            <a:solidFill>
+              <a:srgbClr val="D9E0E6"/>
+            </a:solidFill>
           </a:ln>
         </p:spPr>
       </p:sp>
@@ -8441,19 +8445,19 @@
           <p:cNvPr id="15" name="">
             <a:extLst xmlns:a="http://schemas.openxmlformats.org/drawingml/2006/main">
               <a:ext uri="{FF2B5EF4-FFF2-40B4-BE49-F238E27FC236}">
-                <a16:creationId xmlns:a16="http://schemas.microsoft.com/office/drawing/2014/main" id="{5BA0D8C4-9924-4690-9BC3-D63313D8738A}"/>
-              </a:ext>
-            </a:extLst>
-          </p:cNvPr>
-          <p:cNvSpPr>
-            <a:spLocks xmlns:a="http://schemas.openxmlformats.org/drawingml/2006/main" noGrp="1"/>
-          </p:cNvSpPr>
-          <p:nvPr/>
-        </p:nvSpPr>
-        <p:spPr>
-          <a:xfrm xmlns:a="http://schemas.openxmlformats.org/drawingml/2006/main">
-            <a:off x="1000125" y="3019425"/>
-            <a:ext cx="476250" cy="419100"/>
+                <a16:creationId xmlns:a16="http://schemas.microsoft.com/office/drawing/2014/main" id="{B96163F1-42BC-4ECA-B6DE-4D764B914567}"/>
+              </a:ext>
+            </a:extLst>
+          </p:cNvPr>
+          <p:cNvSpPr>
+            <a:spLocks xmlns:a="http://schemas.openxmlformats.org/drawingml/2006/main" noGrp="1"/>
+          </p:cNvSpPr>
+          <p:nvPr/>
+        </p:nvSpPr>
+        <p:spPr>
+          <a:xfrm xmlns:a="http://schemas.openxmlformats.org/drawingml/2006/main">
+            <a:off x="1162050" y="3076575"/>
+            <a:ext cx="400050" cy="400050"/>
           </a:xfrm>
           <a:prstGeom xmlns:a="http://schemas.openxmlformats.org/drawingml/2006/main" prst="rect">
             <a:avLst/>
@@ -8470,9 +8474,9 @@
           <a:lstStyle xmlns:a="http://schemas.openxmlformats.org/drawingml/2006/main"/>
           <a:p xmlns:a="http://schemas.openxmlformats.org/drawingml/2006/main">
             <a:pPr algn="ctr">
-              <a:defRPr sz="1350" b="1">
-                <a:solidFill>
-                  <a:srgbClr val="FFFFFF"/>
+              <a:defRPr sz="1125" b="1">
+                <a:solidFill>
+                  <a:srgbClr val="2C6E73"/>
                 </a:solidFill>
                 <a:latin typeface="Arial"/>
                 <a:ea typeface="Arial"/>
@@ -8480,9 +8484,9 @@
               </a:defRPr>
             </a:pPr>
             <a:r>
-              <a:rPr sz="1350" b="1">
-                <a:solidFill>
-                  <a:srgbClr val="FFFFFF"/>
+              <a:rPr sz="1125" b="1">
+                <a:solidFill>
+                  <a:srgbClr val="2C6E73"/>
                 </a:solidFill>
                 <a:latin typeface="Arial"/>
                 <a:ea typeface="Arial"/>
@@ -8498,19 +8502,19 @@
           <p:cNvPr id="16" name="">
             <a:extLst xmlns:a="http://schemas.openxmlformats.org/drawingml/2006/main">
               <a:ext uri="{FF2B5EF4-FFF2-40B4-BE49-F238E27FC236}">
-                <a16:creationId xmlns:a16="http://schemas.microsoft.com/office/drawing/2014/main" id="{F58517A7-F522-4AFE-AC2D-09216ECEE965}"/>
-              </a:ext>
-            </a:extLst>
-          </p:cNvPr>
-          <p:cNvSpPr>
-            <a:spLocks xmlns:a="http://schemas.openxmlformats.org/drawingml/2006/main" noGrp="1"/>
-          </p:cNvSpPr>
-          <p:nvPr/>
-        </p:nvSpPr>
-        <p:spPr>
-          <a:xfrm xmlns:a="http://schemas.openxmlformats.org/drawingml/2006/main">
-            <a:off x="1714500" y="2924175"/>
-            <a:ext cx="9429750" cy="609600"/>
+                <a16:creationId xmlns:a16="http://schemas.microsoft.com/office/drawing/2014/main" id="{D03EA5E9-9792-49C8-B4C8-903E665AB8BE}"/>
+              </a:ext>
+            </a:extLst>
+          </p:cNvPr>
+          <p:cNvSpPr>
+            <a:spLocks xmlns:a="http://schemas.openxmlformats.org/drawingml/2006/main" noGrp="1"/>
+          </p:cNvSpPr>
+          <p:nvPr/>
+        </p:nvSpPr>
+        <p:spPr>
+          <a:xfrm xmlns:a="http://schemas.openxmlformats.org/drawingml/2006/main">
+            <a:off x="1714500" y="2990850"/>
+            <a:ext cx="9525000" cy="809625"/>
           </a:xfrm>
           <a:prstGeom xmlns:a="http://schemas.openxmlformats.org/drawingml/2006/main" prst="rect">
             <a:avLst/>
@@ -8527,7 +8531,7 @@
           <a:lstStyle xmlns:a="http://schemas.openxmlformats.org/drawingml/2006/main"/>
           <a:p xmlns:a="http://schemas.openxmlformats.org/drawingml/2006/main">
             <a:pPr algn="l">
-              <a:defRPr sz="1500" b="0">
+              <a:defRPr sz="1725" b="0">
                 <a:solidFill>
                   <a:srgbClr val="17253A"/>
                 </a:solidFill>
@@ -8537,7 +8541,7 @@
               </a:defRPr>
             </a:pPr>
             <a:r>
-              <a:rPr sz="1500" b="0">
+              <a:rPr sz="1725" b="0">
                 <a:solidFill>
                   <a:srgbClr val="17253A"/>
                 </a:solidFill>
@@ -8545,7 +8549,7 @@
                 <a:ea typeface="Arial"/>
                 <a:cs typeface="Arial"/>
               </a:rPr>
-              <a:t>Set up the method: Undo operations in reverse order.</a:t>
+              <a:t>2x + 6 = 20 → 2x = 14 → x = 7</a:t>
             </a:r>
           </a:p>
         </p:txBody>
@@ -8555,28 +8559,30 @@
           <p:cNvPr id="17" name="">
             <a:extLst xmlns:a="http://schemas.openxmlformats.org/drawingml/2006/main">
               <a:ext uri="{FF2B5EF4-FFF2-40B4-BE49-F238E27FC236}">
-                <a16:creationId xmlns:a16="http://schemas.microsoft.com/office/drawing/2014/main" id="{79FD4F55-6DE6-45D8-A3DD-18B6BC3DEB5D}"/>
-              </a:ext>
-            </a:extLst>
-          </p:cNvPr>
-          <p:cNvSpPr>
-            <a:spLocks xmlns:a="http://schemas.openxmlformats.org/drawingml/2006/main" noGrp="1"/>
-          </p:cNvSpPr>
-          <p:nvPr/>
-        </p:nvSpPr>
-        <p:spPr>
-          <a:xfrm xmlns:a="http://schemas.openxmlformats.org/drawingml/2006/main">
-            <a:off x="1000125" y="3733800"/>
-            <a:ext cx="476250" cy="476250"/>
-          </a:xfrm>
-          <a:prstGeom xmlns:a="http://schemas.openxmlformats.org/drawingml/2006/main" prst="ellipse">
+                <a16:creationId xmlns:a16="http://schemas.microsoft.com/office/drawing/2014/main" id="{D3D3893E-5B3F-40B9-99BA-B86FCF58FD02}"/>
+              </a:ext>
+            </a:extLst>
+          </p:cNvPr>
+          <p:cNvSpPr>
+            <a:spLocks xmlns:a="http://schemas.openxmlformats.org/drawingml/2006/main" noGrp="1"/>
+          </p:cNvSpPr>
+          <p:nvPr/>
+        </p:nvSpPr>
+        <p:spPr>
+          <a:xfrm xmlns:a="http://schemas.openxmlformats.org/drawingml/2006/main">
+            <a:off x="1714500" y="3819525"/>
+            <a:ext cx="9334500" cy="9525"/>
+          </a:xfrm>
+          <a:prstGeom xmlns:a="http://schemas.openxmlformats.org/drawingml/2006/main" prst="rect">
             <a:avLst/>
           </a:prstGeom>
           <a:solidFill xmlns:a="http://schemas.openxmlformats.org/drawingml/2006/main">
-            <a:srgbClr val="2C6E73"/>
+            <a:srgbClr val="D9E0E6"/>
           </a:solidFill>
           <a:ln xmlns:a="http://schemas.openxmlformats.org/drawingml/2006/main" w="0">
-            <a:noFill/>
+            <a:solidFill>
+              <a:srgbClr val="D9E0E6"/>
+            </a:solidFill>
           </a:ln>
         </p:spPr>
       </p:sp>
@@ -8585,19 +8591,19 @@
           <p:cNvPr id="18" name="">
             <a:extLst xmlns:a="http://schemas.openxmlformats.org/drawingml/2006/main">
               <a:ext uri="{FF2B5EF4-FFF2-40B4-BE49-F238E27FC236}">
-                <a16:creationId xmlns:a16="http://schemas.microsoft.com/office/drawing/2014/main" id="{3C2CC0AC-B57F-4FB9-B163-C2963971526E}"/>
-              </a:ext>
-            </a:extLst>
-          </p:cNvPr>
-          <p:cNvSpPr>
-            <a:spLocks xmlns:a="http://schemas.openxmlformats.org/drawingml/2006/main" noGrp="1"/>
-          </p:cNvSpPr>
-          <p:nvPr/>
-        </p:nvSpPr>
-        <p:spPr>
-          <a:xfrm xmlns:a="http://schemas.openxmlformats.org/drawingml/2006/main">
-            <a:off x="1000125" y="3762375"/>
-            <a:ext cx="476250" cy="419100"/>
+                <a16:creationId xmlns:a16="http://schemas.microsoft.com/office/drawing/2014/main" id="{C9452830-47B8-4C12-9A89-1E72B7887416}"/>
+              </a:ext>
+            </a:extLst>
+          </p:cNvPr>
+          <p:cNvSpPr>
+            <a:spLocks xmlns:a="http://schemas.openxmlformats.org/drawingml/2006/main" noGrp="1"/>
+          </p:cNvSpPr>
+          <p:nvPr/>
+        </p:nvSpPr>
+        <p:spPr>
+          <a:xfrm xmlns:a="http://schemas.openxmlformats.org/drawingml/2006/main">
+            <a:off x="1162050" y="3952875"/>
+            <a:ext cx="400050" cy="400050"/>
           </a:xfrm>
           <a:prstGeom xmlns:a="http://schemas.openxmlformats.org/drawingml/2006/main" prst="rect">
             <a:avLst/>
@@ -8614,9 +8620,9 @@
           <a:lstStyle xmlns:a="http://schemas.openxmlformats.org/drawingml/2006/main"/>
           <a:p xmlns:a="http://schemas.openxmlformats.org/drawingml/2006/main">
             <a:pPr algn="ctr">
-              <a:defRPr sz="1350" b="1">
-                <a:solidFill>
-                  <a:srgbClr val="FFFFFF"/>
+              <a:defRPr sz="1125" b="1">
+                <a:solidFill>
+                  <a:srgbClr val="2C6E73"/>
                 </a:solidFill>
                 <a:latin typeface="Arial"/>
                 <a:ea typeface="Arial"/>
@@ -8624,9 +8630,9 @@
               </a:defRPr>
             </a:pPr>
             <a:r>
-              <a:rPr sz="1350" b="1">
-                <a:solidFill>
-                  <a:srgbClr val="FFFFFF"/>
+              <a:rPr sz="1125" b="1">
+                <a:solidFill>
+                  <a:srgbClr val="2C6E73"/>
                 </a:solidFill>
                 <a:latin typeface="Arial"/>
                 <a:ea typeface="Arial"/>
@@ -8642,19 +8648,19 @@
           <p:cNvPr id="19" name="">
             <a:extLst xmlns:a="http://schemas.openxmlformats.org/drawingml/2006/main">
               <a:ext uri="{FF2B5EF4-FFF2-40B4-BE49-F238E27FC236}">
-                <a16:creationId xmlns:a16="http://schemas.microsoft.com/office/drawing/2014/main" id="{F7D443BD-06D7-4167-974E-E6D80FBCB876}"/>
-              </a:ext>
-            </a:extLst>
-          </p:cNvPr>
-          <p:cNvSpPr>
-            <a:spLocks xmlns:a="http://schemas.openxmlformats.org/drawingml/2006/main" noGrp="1"/>
-          </p:cNvSpPr>
-          <p:nvPr/>
-        </p:nvSpPr>
-        <p:spPr>
-          <a:xfrm xmlns:a="http://schemas.openxmlformats.org/drawingml/2006/main">
-            <a:off x="1714500" y="3667125"/>
-            <a:ext cx="9429750" cy="609600"/>
+                <a16:creationId xmlns:a16="http://schemas.microsoft.com/office/drawing/2014/main" id="{3DCA4813-55F5-48D7-8E65-D816819C666B}"/>
+              </a:ext>
+            </a:extLst>
+          </p:cNvPr>
+          <p:cNvSpPr>
+            <a:spLocks xmlns:a="http://schemas.openxmlformats.org/drawingml/2006/main" noGrp="1"/>
+          </p:cNvSpPr>
+          <p:nvPr/>
+        </p:nvSpPr>
+        <p:spPr>
+          <a:xfrm xmlns:a="http://schemas.openxmlformats.org/drawingml/2006/main">
+            <a:off x="1714500" y="3867150"/>
+            <a:ext cx="9525000" cy="809625"/>
           </a:xfrm>
           <a:prstGeom xmlns:a="http://schemas.openxmlformats.org/drawingml/2006/main" prst="rect">
             <a:avLst/>
@@ -8671,7 +8677,7 @@
           <a:lstStyle xmlns:a="http://schemas.openxmlformats.org/drawingml/2006/main"/>
           <a:p xmlns:a="http://schemas.openxmlformats.org/drawingml/2006/main">
             <a:pPr algn="l">
-              <a:defRPr sz="1500" b="0">
+              <a:defRPr sz="1725" b="0">
                 <a:solidFill>
                   <a:srgbClr val="17253A"/>
                 </a:solidFill>
@@ -8681,7 +8687,7 @@
               </a:defRPr>
             </a:pPr>
             <a:r>
-              <a:rPr sz="1500" b="0">
+              <a:rPr sz="1725" b="0">
                 <a:solidFill>
                   <a:srgbClr val="17253A"/>
                 </a:solidFill>
@@ -8689,7 +8695,7 @@
                 <a:ea typeface="Arial"/>
                 <a:cs typeface="Arial"/>
               </a:rPr>
-              <a:t>Complete the calculation: Yes, both give x = 7.</a:t>
+              <a:t>Both equations give x = 7</a:t>
             </a:r>
           </a:p>
         </p:txBody>
@@ -8699,28 +8705,30 @@
           <p:cNvPr id="20" name="">
             <a:extLst xmlns:a="http://schemas.openxmlformats.org/drawingml/2006/main">
               <a:ext uri="{FF2B5EF4-FFF2-40B4-BE49-F238E27FC236}">
-                <a16:creationId xmlns:a16="http://schemas.microsoft.com/office/drawing/2014/main" id="{009F0B8B-D03F-4632-BE01-236BB2F48B8F}"/>
-              </a:ext>
-            </a:extLst>
-          </p:cNvPr>
-          <p:cNvSpPr>
-            <a:spLocks xmlns:a="http://schemas.openxmlformats.org/drawingml/2006/main" noGrp="1"/>
-          </p:cNvSpPr>
-          <p:nvPr/>
-        </p:nvSpPr>
-        <p:spPr>
-          <a:xfrm xmlns:a="http://schemas.openxmlformats.org/drawingml/2006/main">
-            <a:off x="1000125" y="4476750"/>
-            <a:ext cx="476250" cy="476250"/>
-          </a:xfrm>
-          <a:prstGeom xmlns:a="http://schemas.openxmlformats.org/drawingml/2006/main" prst="ellipse">
+                <a16:creationId xmlns:a16="http://schemas.microsoft.com/office/drawing/2014/main" id="{BBC7BF71-9F65-40F4-9111-69F517150539}"/>
+              </a:ext>
+            </a:extLst>
+          </p:cNvPr>
+          <p:cNvSpPr>
+            <a:spLocks xmlns:a="http://schemas.openxmlformats.org/drawingml/2006/main" noGrp="1"/>
+          </p:cNvSpPr>
+          <p:nvPr/>
+        </p:nvSpPr>
+        <p:spPr>
+          <a:xfrm xmlns:a="http://schemas.openxmlformats.org/drawingml/2006/main">
+            <a:off x="1714500" y="4695825"/>
+            <a:ext cx="9334500" cy="9525"/>
+          </a:xfrm>
+          <a:prstGeom xmlns:a="http://schemas.openxmlformats.org/drawingml/2006/main" prst="rect">
             <a:avLst/>
           </a:prstGeom>
           <a:solidFill xmlns:a="http://schemas.openxmlformats.org/drawingml/2006/main">
-            <a:srgbClr val="2C6E73"/>
+            <a:srgbClr val="D9E0E6"/>
           </a:solidFill>
           <a:ln xmlns:a="http://schemas.openxmlformats.org/drawingml/2006/main" w="0">
-            <a:noFill/>
+            <a:solidFill>
+              <a:srgbClr val="D9E0E6"/>
+            </a:solidFill>
           </a:ln>
         </p:spPr>
       </p:sp>
@@ -8729,19 +8737,19 @@
           <p:cNvPr id="21" name="">
             <a:extLst xmlns:a="http://schemas.openxmlformats.org/drawingml/2006/main">
               <a:ext uri="{FF2B5EF4-FFF2-40B4-BE49-F238E27FC236}">
-                <a16:creationId xmlns:a16="http://schemas.microsoft.com/office/drawing/2014/main" id="{EDC361AC-67E5-4A08-897E-1FAEA04D3A21}"/>
-              </a:ext>
-            </a:extLst>
-          </p:cNvPr>
-          <p:cNvSpPr>
-            <a:spLocks xmlns:a="http://schemas.openxmlformats.org/drawingml/2006/main" noGrp="1"/>
-          </p:cNvSpPr>
-          <p:nvPr/>
-        </p:nvSpPr>
-        <p:spPr>
-          <a:xfrm xmlns:a="http://schemas.openxmlformats.org/drawingml/2006/main">
-            <a:off x="1000125" y="4505325"/>
-            <a:ext cx="476250" cy="419100"/>
+                <a16:creationId xmlns:a16="http://schemas.microsoft.com/office/drawing/2014/main" id="{545D73D0-DBE2-4EFD-8EEE-2792A3D43363}"/>
+              </a:ext>
+            </a:extLst>
+          </p:cNvPr>
+          <p:cNvSpPr>
+            <a:spLocks xmlns:a="http://schemas.openxmlformats.org/drawingml/2006/main" noGrp="1"/>
+          </p:cNvSpPr>
+          <p:nvPr/>
+        </p:nvSpPr>
+        <p:spPr>
+          <a:xfrm xmlns:a="http://schemas.openxmlformats.org/drawingml/2006/main">
+            <a:off x="1162050" y="4829175"/>
+            <a:ext cx="400050" cy="400050"/>
           </a:xfrm>
           <a:prstGeom xmlns:a="http://schemas.openxmlformats.org/drawingml/2006/main" prst="rect">
             <a:avLst/>
@@ -8758,9 +8766,9 @@
           <a:lstStyle xmlns:a="http://schemas.openxmlformats.org/drawingml/2006/main"/>
           <a:p xmlns:a="http://schemas.openxmlformats.org/drawingml/2006/main">
             <a:pPr algn="ctr">
-              <a:defRPr sz="1350" b="1">
-                <a:solidFill>
-                  <a:srgbClr val="FFFFFF"/>
+              <a:defRPr sz="1125" b="1">
+                <a:solidFill>
+                  <a:srgbClr val="2F785D"/>
                 </a:solidFill>
                 <a:latin typeface="Arial"/>
                 <a:ea typeface="Arial"/>
@@ -8768,9 +8776,9 @@
               </a:defRPr>
             </a:pPr>
             <a:r>
-              <a:rPr sz="1350" b="1">
-                <a:solidFill>
-                  <a:srgbClr val="FFFFFF"/>
+              <a:rPr sz="1125" b="1">
+                <a:solidFill>
+                  <a:srgbClr val="2F785D"/>
                 </a:solidFill>
                 <a:latin typeface="Arial"/>
                 <a:ea typeface="Arial"/>
@@ -8786,19 +8794,19 @@
           <p:cNvPr id="22" name="">
             <a:extLst xmlns:a="http://schemas.openxmlformats.org/drawingml/2006/main">
               <a:ext uri="{FF2B5EF4-FFF2-40B4-BE49-F238E27FC236}">
-                <a16:creationId xmlns:a16="http://schemas.microsoft.com/office/drawing/2014/main" id="{126D6373-37B6-44E6-AD34-7C321E3C80E3}"/>
-              </a:ext>
-            </a:extLst>
-          </p:cNvPr>
-          <p:cNvSpPr>
-            <a:spLocks xmlns:a="http://schemas.openxmlformats.org/drawingml/2006/main" noGrp="1"/>
-          </p:cNvSpPr>
-          <p:nvPr/>
-        </p:nvSpPr>
-        <p:spPr>
-          <a:xfrm xmlns:a="http://schemas.openxmlformats.org/drawingml/2006/main">
-            <a:off x="1714500" y="4410075"/>
-            <a:ext cx="9429750" cy="609600"/>
+                <a16:creationId xmlns:a16="http://schemas.microsoft.com/office/drawing/2014/main" id="{610C1FDA-4C9E-4E04-99AD-71D92FBC0FB6}"/>
+              </a:ext>
+            </a:extLst>
+          </p:cNvPr>
+          <p:cNvSpPr>
+            <a:spLocks xmlns:a="http://schemas.openxmlformats.org/drawingml/2006/main" noGrp="1"/>
+          </p:cNvSpPr>
+          <p:nvPr/>
+        </p:nvSpPr>
+        <p:spPr>
+          <a:xfrm xmlns:a="http://schemas.openxmlformats.org/drawingml/2006/main">
+            <a:off x="1714500" y="4743450"/>
+            <a:ext cx="9525000" cy="809625"/>
           </a:xfrm>
           <a:prstGeom xmlns:a="http://schemas.openxmlformats.org/drawingml/2006/main" prst="rect">
             <a:avLst/>
@@ -8815,7 +8823,7 @@
           <a:lstStyle xmlns:a="http://schemas.openxmlformats.org/drawingml/2006/main"/>
           <a:p xmlns:a="http://schemas.openxmlformats.org/drawingml/2006/main">
             <a:pPr algn="l">
-              <a:defRPr sz="1500" b="1">
+              <a:defRPr sz="1725" b="1">
                 <a:solidFill>
                   <a:srgbClr val="2F785D"/>
                 </a:solidFill>
@@ -8825,7 +8833,7 @@
               </a:defRPr>
             </a:pPr>
             <a:r>
-              <a:rPr sz="1500" b="1">
+              <a:rPr sz="1725" b="1">
                 <a:solidFill>
                   <a:srgbClr val="2F785D"/>
                 </a:solidFill>
@@ -8833,7 +8841,7 @@
                 <a:ea typeface="Arial"/>
                 <a:cs typeface="Arial"/>
               </a:rPr>
-              <a:t>Check the result: Substitute the solution to check the original equation.</a:t>
+              <a:t>Yes, they have the same solution</a:t>
             </a:r>
           </a:p>
         </p:txBody>
@@ -8841,7 +8849,7 @@
     </p:spTree>
     <p:extLst>
       <p:ext uri="{BB962C8B-B14F-4D97-AF65-F5344CB8AC3E}">
-        <p14:creationId xmlns:p14="http://schemas.microsoft.com/office/powerpoint/2010/main" val="1567151640"/>
+        <p14:creationId xmlns:p14="http://schemas.microsoft.com/office/powerpoint/2010/main" val="702126938"/>
       </p:ext>
     </p:extLst>
   </p:cSld>
@@ -9134,7 +9142,7 @@
           <p:cNvPr id="15" name="">
             <a:extLst xmlns:a="http://schemas.openxmlformats.org/drawingml/2006/main">
               <a:ext uri="{FF2B5EF4-FFF2-40B4-BE49-F238E27FC236}">
-                <a16:creationId xmlns:a16="http://schemas.microsoft.com/office/drawing/2014/main" id="{AB9DF625-76CC-4AA9-B5CB-54EBD50694CD}"/>
+                <a16:creationId xmlns:a16="http://schemas.microsoft.com/office/drawing/2014/main" id="{728A68E1-5D74-4794-9E95-4CA25D88D641}"/>
               </a:ext>
             </a:extLst>
           </p:cNvPr>
@@ -9166,7 +9174,7 @@
           <p:cNvPr id="2" name="">
             <a:extLst xmlns:a="http://schemas.openxmlformats.org/drawingml/2006/main">
               <a:ext uri="{FF2B5EF4-FFF2-40B4-BE49-F238E27FC236}">
-                <a16:creationId xmlns:a16="http://schemas.microsoft.com/office/drawing/2014/main" id="{0715ECA0-E835-424E-A959-DF211CEF9D75}"/>
+                <a16:creationId xmlns:a16="http://schemas.microsoft.com/office/drawing/2014/main" id="{32AB5FCA-3D17-4202-9297-19774B0E52D4}"/>
               </a:ext>
             </a:extLst>
           </p:cNvPr>
@@ -9223,7 +9231,7 @@
           <p:cNvPr id="3" name="">
             <a:extLst xmlns:a="http://schemas.openxmlformats.org/drawingml/2006/main">
               <a:ext uri="{FF2B5EF4-FFF2-40B4-BE49-F238E27FC236}">
-                <a16:creationId xmlns:a16="http://schemas.microsoft.com/office/drawing/2014/main" id="{0F6DA846-33F5-4995-BA77-B72999A1D9A2}"/>
+                <a16:creationId xmlns:a16="http://schemas.microsoft.com/office/drawing/2014/main" id="{83AFA00C-D333-4990-8B3F-781C60339EAE}"/>
               </a:ext>
             </a:extLst>
           </p:cNvPr>
@@ -9255,7 +9263,7 @@
           <p:cNvPr id="4" name="">
             <a:extLst xmlns:a="http://schemas.openxmlformats.org/drawingml/2006/main">
               <a:ext uri="{FF2B5EF4-FFF2-40B4-BE49-F238E27FC236}">
-                <a16:creationId xmlns:a16="http://schemas.microsoft.com/office/drawing/2014/main" id="{44AB226B-0AF2-441B-B484-B5841DF8FC94}"/>
+                <a16:creationId xmlns:a16="http://schemas.microsoft.com/office/drawing/2014/main" id="{CC75C52A-7146-4155-934B-037793A3CEF7}"/>
               </a:ext>
             </a:extLst>
           </p:cNvPr>
@@ -9312,7 +9320,7 @@
           <p:cNvPr id="5" name="">
             <a:extLst xmlns:a="http://schemas.openxmlformats.org/drawingml/2006/main">
               <a:ext uri="{FF2B5EF4-FFF2-40B4-BE49-F238E27FC236}">
-                <a16:creationId xmlns:a16="http://schemas.microsoft.com/office/drawing/2014/main" id="{53FD205E-2FA6-4C7E-9052-57533BD452CB}"/>
+                <a16:creationId xmlns:a16="http://schemas.microsoft.com/office/drawing/2014/main" id="{FA7AFA05-A8E9-400C-9DA8-6D902A4A8B67}"/>
               </a:ext>
             </a:extLst>
           </p:cNvPr>
@@ -9369,7 +9377,7 @@
           <p:cNvPr id="6" name="">
             <a:extLst xmlns:a="http://schemas.openxmlformats.org/drawingml/2006/main">
               <a:ext uri="{FF2B5EF4-FFF2-40B4-BE49-F238E27FC236}">
-                <a16:creationId xmlns:a16="http://schemas.microsoft.com/office/drawing/2014/main" id="{CBB7FFFC-D74D-464F-9DFF-B719CA1C0ED1}"/>
+                <a16:creationId xmlns:a16="http://schemas.microsoft.com/office/drawing/2014/main" id="{A99DC040-5002-48DC-900A-D73F5BC7E49D}"/>
               </a:ext>
             </a:extLst>
           </p:cNvPr>
@@ -9426,7 +9434,7 @@
           <p:cNvPr id="7" name="">
             <a:extLst xmlns:a="http://schemas.openxmlformats.org/drawingml/2006/main">
               <a:ext uri="{FF2B5EF4-FFF2-40B4-BE49-F238E27FC236}">
-                <a16:creationId xmlns:a16="http://schemas.microsoft.com/office/drawing/2014/main" id="{42D57F73-1C78-413B-A136-EB025B7E5548}"/>
+                <a16:creationId xmlns:a16="http://schemas.microsoft.com/office/drawing/2014/main" id="{75BBF50D-9BA1-4A03-B4A1-0E1BA1E9533A}"/>
               </a:ext>
             </a:extLst>
           </p:cNvPr>
@@ -9458,7 +9466,7 @@
           <p:cNvPr id="8" name="">
             <a:extLst xmlns:a="http://schemas.openxmlformats.org/drawingml/2006/main">
               <a:ext uri="{FF2B5EF4-FFF2-40B4-BE49-F238E27FC236}">
-                <a16:creationId xmlns:a16="http://schemas.microsoft.com/office/drawing/2014/main" id="{62D9203F-BFC9-4586-868D-DEA2F19943F4}"/>
+                <a16:creationId xmlns:a16="http://schemas.microsoft.com/office/drawing/2014/main" id="{FDD1021B-C2BA-44D7-A26D-DE867E362CC7}"/>
               </a:ext>
             </a:extLst>
           </p:cNvPr>
@@ -9515,7 +9523,7 @@
           <p:cNvPr id="9" name="">
             <a:extLst xmlns:a="http://schemas.openxmlformats.org/drawingml/2006/main">
               <a:ext uri="{FF2B5EF4-FFF2-40B4-BE49-F238E27FC236}">
-                <a16:creationId xmlns:a16="http://schemas.microsoft.com/office/drawing/2014/main" id="{C36A7D95-40B8-444B-8231-77510A226BAA}"/>
+                <a16:creationId xmlns:a16="http://schemas.microsoft.com/office/drawing/2014/main" id="{47B13C2A-548B-4DC6-952A-8EF04AE5EB43}"/>
               </a:ext>
             </a:extLst>
           </p:cNvPr>
@@ -9572,7 +9580,7 @@
           <p:cNvPr id="10" name="">
             <a:extLst xmlns:a="http://schemas.openxmlformats.org/drawingml/2006/main">
               <a:ext uri="{FF2B5EF4-FFF2-40B4-BE49-F238E27FC236}">
-                <a16:creationId xmlns:a16="http://schemas.microsoft.com/office/drawing/2014/main" id="{592D7D75-FEA8-4BDB-89A3-CBBF565DB8AD}"/>
+                <a16:creationId xmlns:a16="http://schemas.microsoft.com/office/drawing/2014/main" id="{BA3CDFFD-B553-49D4-A6B9-B3719C056E15}"/>
               </a:ext>
             </a:extLst>
           </p:cNvPr>
@@ -9629,7 +9637,7 @@
           <p:cNvPr id="11" name="">
             <a:extLst xmlns:a="http://schemas.openxmlformats.org/drawingml/2006/main">
               <a:ext uri="{FF2B5EF4-FFF2-40B4-BE49-F238E27FC236}">
-                <a16:creationId xmlns:a16="http://schemas.microsoft.com/office/drawing/2014/main" id="{D52DE4F0-8B18-4B90-968C-B5A756D7686E}"/>
+                <a16:creationId xmlns:a16="http://schemas.microsoft.com/office/drawing/2014/main" id="{58FC7305-0015-4988-B9A5-DB8E5BF28E23}"/>
               </a:ext>
             </a:extLst>
           </p:cNvPr>
@@ -9686,7 +9694,7 @@
           <p:cNvPr id="12" name="">
             <a:extLst xmlns:a="http://schemas.openxmlformats.org/drawingml/2006/main">
               <a:ext uri="{FF2B5EF4-FFF2-40B4-BE49-F238E27FC236}">
-                <a16:creationId xmlns:a16="http://schemas.microsoft.com/office/drawing/2014/main" id="{96B4DEC2-1A29-4861-A505-B48EE92B3EA0}"/>
+                <a16:creationId xmlns:a16="http://schemas.microsoft.com/office/drawing/2014/main" id="{6F394C75-355B-43A7-9036-8260F01E8966}"/>
               </a:ext>
             </a:extLst>
           </p:cNvPr>
@@ -9718,7 +9726,7 @@
           <p:cNvPr id="13" name="">
             <a:extLst xmlns:a="http://schemas.openxmlformats.org/drawingml/2006/main">
               <a:ext uri="{FF2B5EF4-FFF2-40B4-BE49-F238E27FC236}">
-                <a16:creationId xmlns:a16="http://schemas.microsoft.com/office/drawing/2014/main" id="{BF1738A2-402D-4E47-85F3-05C7916A69DC}"/>
+                <a16:creationId xmlns:a16="http://schemas.microsoft.com/office/drawing/2014/main" id="{2205F162-34F9-4921-85DC-7E64A31EE1D0}"/>
               </a:ext>
             </a:extLst>
           </p:cNvPr>
@@ -9775,7 +9783,7 @@
           <p:cNvPr id="14" name="">
             <a:extLst xmlns:a="http://schemas.openxmlformats.org/drawingml/2006/main">
               <a:ext uri="{FF2B5EF4-FFF2-40B4-BE49-F238E27FC236}">
-                <a16:creationId xmlns:a16="http://schemas.microsoft.com/office/drawing/2014/main" id="{A98C59D1-B860-4EE3-95BA-DFB60AFD12E9}"/>
+                <a16:creationId xmlns:a16="http://schemas.microsoft.com/office/drawing/2014/main" id="{F3912923-E779-4C69-B01B-980E2CC7A963}"/>
               </a:ext>
             </a:extLst>
           </p:cNvPr>
@@ -9830,7 +9838,7 @@
     </p:spTree>
     <p:extLst>
       <p:ext uri="{BB962C8B-B14F-4D97-AF65-F5344CB8AC3E}">
-        <p14:creationId xmlns:p14="http://schemas.microsoft.com/office/powerpoint/2010/main" val="634885206"/>
+        <p14:creationId xmlns:p14="http://schemas.microsoft.com/office/powerpoint/2010/main" val="637435081"/>
       </p:ext>
     </p:extLst>
   </p:cSld>
@@ -10031,7 +10039,7 @@
           <p:cNvPr id="16" name="">
             <a:extLst xmlns:a="http://schemas.openxmlformats.org/drawingml/2006/main">
               <a:ext uri="{FF2B5EF4-FFF2-40B4-BE49-F238E27FC236}">
-                <a16:creationId xmlns:a16="http://schemas.microsoft.com/office/drawing/2014/main" id="{56C575F0-999F-4D91-847C-50E6DC34D7D5}"/>
+                <a16:creationId xmlns:a16="http://schemas.microsoft.com/office/drawing/2014/main" id="{AA5E3238-EE92-478A-9797-526869FB6C23}"/>
               </a:ext>
             </a:extLst>
           </p:cNvPr>
@@ -10063,7 +10071,7 @@
           <p:cNvPr id="2" name="">
             <a:extLst xmlns:a="http://schemas.openxmlformats.org/drawingml/2006/main">
               <a:ext uri="{FF2B5EF4-FFF2-40B4-BE49-F238E27FC236}">
-                <a16:creationId xmlns:a16="http://schemas.microsoft.com/office/drawing/2014/main" id="{B2F18C2F-77A6-4FF5-B06E-559DC27D52AC}"/>
+                <a16:creationId xmlns:a16="http://schemas.microsoft.com/office/drawing/2014/main" id="{4BDD347E-7D0C-426B-8958-79C7F1FE1E38}"/>
               </a:ext>
             </a:extLst>
           </p:cNvPr>
@@ -10120,7 +10128,7 @@
           <p:cNvPr id="3" name="">
             <a:extLst xmlns:a="http://schemas.openxmlformats.org/drawingml/2006/main">
               <a:ext uri="{FF2B5EF4-FFF2-40B4-BE49-F238E27FC236}">
-                <a16:creationId xmlns:a16="http://schemas.microsoft.com/office/drawing/2014/main" id="{B784C009-E963-4FEB-84E5-DFC150D03816}"/>
+                <a16:creationId xmlns:a16="http://schemas.microsoft.com/office/drawing/2014/main" id="{4FD8FE9E-4C2D-4C02-BBEB-AF2F185D4B1C}"/>
               </a:ext>
             </a:extLst>
           </p:cNvPr>
@@ -10152,7 +10160,7 @@
           <p:cNvPr id="4" name="">
             <a:extLst xmlns:a="http://schemas.openxmlformats.org/drawingml/2006/main">
               <a:ext uri="{FF2B5EF4-FFF2-40B4-BE49-F238E27FC236}">
-                <a16:creationId xmlns:a16="http://schemas.microsoft.com/office/drawing/2014/main" id="{ACBB95E9-5BCB-4268-B131-5644B8F6FB88}"/>
+                <a16:creationId xmlns:a16="http://schemas.microsoft.com/office/drawing/2014/main" id="{B5444D89-7072-418E-9C48-8BB9F1F27980}"/>
               </a:ext>
             </a:extLst>
           </p:cNvPr>
@@ -10209,7 +10217,7 @@
           <p:cNvPr id="5" name="">
             <a:extLst xmlns:a="http://schemas.openxmlformats.org/drawingml/2006/main">
               <a:ext uri="{FF2B5EF4-FFF2-40B4-BE49-F238E27FC236}">
-                <a16:creationId xmlns:a16="http://schemas.microsoft.com/office/drawing/2014/main" id="{529E8FF6-7038-4080-A354-7171C09DAF01}"/>
+                <a16:creationId xmlns:a16="http://schemas.microsoft.com/office/drawing/2014/main" id="{8D013CBD-5FB8-4B62-ACBA-6BFCBD656900}"/>
               </a:ext>
             </a:extLst>
           </p:cNvPr>
@@ -10266,7 +10274,7 @@
           <p:cNvPr id="6" name="">
             <a:extLst xmlns:a="http://schemas.openxmlformats.org/drawingml/2006/main">
               <a:ext uri="{FF2B5EF4-FFF2-40B4-BE49-F238E27FC236}">
-                <a16:creationId xmlns:a16="http://schemas.microsoft.com/office/drawing/2014/main" id="{14525F4A-C46E-45A2-ABEB-560A7D5B367D}"/>
+                <a16:creationId xmlns:a16="http://schemas.microsoft.com/office/drawing/2014/main" id="{4A96259F-2DFC-40DB-8AD9-235BC5078128}"/>
               </a:ext>
             </a:extLst>
           </p:cNvPr>
@@ -10323,7 +10331,7 @@
           <p:cNvPr id="7" name="">
             <a:extLst xmlns:a="http://schemas.openxmlformats.org/drawingml/2006/main">
               <a:ext uri="{FF2B5EF4-FFF2-40B4-BE49-F238E27FC236}">
-                <a16:creationId xmlns:a16="http://schemas.microsoft.com/office/drawing/2014/main" id="{326C7060-0CEB-425C-9C34-2F388C486EC3}"/>
+                <a16:creationId xmlns:a16="http://schemas.microsoft.com/office/drawing/2014/main" id="{E9E43A05-1D20-43B0-A3FF-538556D170D7}"/>
               </a:ext>
             </a:extLst>
           </p:cNvPr>
@@ -10355,7 +10363,7 @@
           <p:cNvPr id="8" name="">
             <a:extLst xmlns:a="http://schemas.openxmlformats.org/drawingml/2006/main">
               <a:ext uri="{FF2B5EF4-FFF2-40B4-BE49-F238E27FC236}">
-                <a16:creationId xmlns:a16="http://schemas.microsoft.com/office/drawing/2014/main" id="{6F2B8245-8290-4A38-A4B8-DB3E428EB23F}"/>
+                <a16:creationId xmlns:a16="http://schemas.microsoft.com/office/drawing/2014/main" id="{C7885F18-2A64-44CB-9313-74A68DF504AB}"/>
               </a:ext>
             </a:extLst>
           </p:cNvPr>
@@ -10412,7 +10420,7 @@
           <p:cNvPr id="9" name="">
             <a:extLst xmlns:a="http://schemas.openxmlformats.org/drawingml/2006/main">
               <a:ext uri="{FF2B5EF4-FFF2-40B4-BE49-F238E27FC236}">
-                <a16:creationId xmlns:a16="http://schemas.microsoft.com/office/drawing/2014/main" id="{B064C78F-E597-45F0-8D55-55223B59F764}"/>
+                <a16:creationId xmlns:a16="http://schemas.microsoft.com/office/drawing/2014/main" id="{F551B24C-308A-42D7-B07F-D173B6D97D92}"/>
               </a:ext>
             </a:extLst>
           </p:cNvPr>
@@ -10469,7 +10477,7 @@
           <p:cNvPr id="10" name="">
             <a:extLst xmlns:a="http://schemas.openxmlformats.org/drawingml/2006/main">
               <a:ext uri="{FF2B5EF4-FFF2-40B4-BE49-F238E27FC236}">
-                <a16:creationId xmlns:a16="http://schemas.microsoft.com/office/drawing/2014/main" id="{E7880FCE-64AC-4467-99A7-E1BA7549FB73}"/>
+                <a16:creationId xmlns:a16="http://schemas.microsoft.com/office/drawing/2014/main" id="{F4A8A076-583E-4F60-88F1-29F82EB3F9CE}"/>
               </a:ext>
             </a:extLst>
           </p:cNvPr>
@@ -10526,7 +10534,7 @@
           <p:cNvPr id="11" name="">
             <a:extLst xmlns:a="http://schemas.openxmlformats.org/drawingml/2006/main">
               <a:ext uri="{FF2B5EF4-FFF2-40B4-BE49-F238E27FC236}">
-                <a16:creationId xmlns:a16="http://schemas.microsoft.com/office/drawing/2014/main" id="{C99F1DBE-BE6F-45D9-B3F6-3B8472EEDE8F}"/>
+                <a16:creationId xmlns:a16="http://schemas.microsoft.com/office/drawing/2014/main" id="{B482E9C1-A7DD-4B9F-B004-8B46304E349B}"/>
               </a:ext>
             </a:extLst>
           </p:cNvPr>
@@ -10583,7 +10591,7 @@
           <p:cNvPr id="12" name="">
             <a:extLst xmlns:a="http://schemas.openxmlformats.org/drawingml/2006/main">
               <a:ext uri="{FF2B5EF4-FFF2-40B4-BE49-F238E27FC236}">
-                <a16:creationId xmlns:a16="http://schemas.microsoft.com/office/drawing/2014/main" id="{85DF4093-F0C7-4154-AC10-001B2E9A2CA6}"/>
+                <a16:creationId xmlns:a16="http://schemas.microsoft.com/office/drawing/2014/main" id="{764EF241-50AD-40FF-9383-617C568ECFE8}"/>
               </a:ext>
             </a:extLst>
           </p:cNvPr>
@@ -10640,7 +10648,7 @@
           <p:cNvPr id="13" name="">
             <a:extLst xmlns:a="http://schemas.openxmlformats.org/drawingml/2006/main">
               <a:ext uri="{FF2B5EF4-FFF2-40B4-BE49-F238E27FC236}">
-                <a16:creationId xmlns:a16="http://schemas.microsoft.com/office/drawing/2014/main" id="{39E5BBEC-C7F0-4B27-A6EA-CF63E3D087F6}"/>
+                <a16:creationId xmlns:a16="http://schemas.microsoft.com/office/drawing/2014/main" id="{8BC8C3BD-4EA8-40FD-985B-0E5EB56ECD0A}"/>
               </a:ext>
             </a:extLst>
           </p:cNvPr>
@@ -10697,7 +10705,7 @@
           <p:cNvPr id="14" name="">
             <a:extLst xmlns:a="http://schemas.openxmlformats.org/drawingml/2006/main">
               <a:ext uri="{FF2B5EF4-FFF2-40B4-BE49-F238E27FC236}">
-                <a16:creationId xmlns:a16="http://schemas.microsoft.com/office/drawing/2014/main" id="{4A58ECE9-96C4-48DE-8FBC-A094D39E0C13}"/>
+                <a16:creationId xmlns:a16="http://schemas.microsoft.com/office/drawing/2014/main" id="{8E9F85C9-EB61-4530-AAB7-73E653B21655}"/>
               </a:ext>
             </a:extLst>
           </p:cNvPr>
@@ -10754,7 +10762,7 @@
           <p:cNvPr id="15" name="">
             <a:extLst xmlns:a="http://schemas.openxmlformats.org/drawingml/2006/main">
               <a:ext uri="{FF2B5EF4-FFF2-40B4-BE49-F238E27FC236}">
-                <a16:creationId xmlns:a16="http://schemas.microsoft.com/office/drawing/2014/main" id="{1D1D934C-6484-4F6B-AB67-65104059819B}"/>
+                <a16:creationId xmlns:a16="http://schemas.microsoft.com/office/drawing/2014/main" id="{E8C4E236-A5C4-443A-BD49-F0DC067D2FCA}"/>
               </a:ext>
             </a:extLst>
           </p:cNvPr>
@@ -10809,7 +10817,7 @@
     </p:spTree>
     <p:extLst>
       <p:ext uri="{BB962C8B-B14F-4D97-AF65-F5344CB8AC3E}">
-        <p14:creationId xmlns:p14="http://schemas.microsoft.com/office/powerpoint/2010/main" val="2116194316"/>
+        <p14:creationId xmlns:p14="http://schemas.microsoft.com/office/powerpoint/2010/main" val="1624692953"/>
       </p:ext>
     </p:extLst>
   </p:cSld>
@@ -10964,7 +10972,7 @@
           <p:cNvPr id="16" name="">
             <a:extLst xmlns:a="http://schemas.openxmlformats.org/drawingml/2006/main">
               <a:ext uri="{FF2B5EF4-FFF2-40B4-BE49-F238E27FC236}">
-                <a16:creationId xmlns:a16="http://schemas.microsoft.com/office/drawing/2014/main" id="{DC29E7C3-317F-4314-AD22-3A03EC4B391E}"/>
+                <a16:creationId xmlns:a16="http://schemas.microsoft.com/office/drawing/2014/main" id="{2EC407E3-546F-428E-9529-C8698CBFE651}"/>
               </a:ext>
             </a:extLst>
           </p:cNvPr>
@@ -10996,7 +11004,7 @@
           <p:cNvPr id="2" name="">
             <a:extLst xmlns:a="http://schemas.openxmlformats.org/drawingml/2006/main">
               <a:ext uri="{FF2B5EF4-FFF2-40B4-BE49-F238E27FC236}">
-                <a16:creationId xmlns:a16="http://schemas.microsoft.com/office/drawing/2014/main" id="{E3319D42-DF5E-4FD3-9945-E5D9F8D55FC9}"/>
+                <a16:creationId xmlns:a16="http://schemas.microsoft.com/office/drawing/2014/main" id="{24DE5F35-4465-47FE-A6CA-88277E52EB00}"/>
               </a:ext>
             </a:extLst>
           </p:cNvPr>
@@ -11053,7 +11061,7 @@
           <p:cNvPr id="3" name="">
             <a:extLst xmlns:a="http://schemas.openxmlformats.org/drawingml/2006/main">
               <a:ext uri="{FF2B5EF4-FFF2-40B4-BE49-F238E27FC236}">
-                <a16:creationId xmlns:a16="http://schemas.microsoft.com/office/drawing/2014/main" id="{9A21F786-EDC6-4E64-B4DA-F5548AADEC42}"/>
+                <a16:creationId xmlns:a16="http://schemas.microsoft.com/office/drawing/2014/main" id="{A27E34D5-2FF7-4CC4-AA84-2E5B7D68BFAB}"/>
               </a:ext>
             </a:extLst>
           </p:cNvPr>
@@ -11085,7 +11093,7 @@
           <p:cNvPr id="4" name="">
             <a:extLst xmlns:a="http://schemas.openxmlformats.org/drawingml/2006/main">
               <a:ext uri="{FF2B5EF4-FFF2-40B4-BE49-F238E27FC236}">
-                <a16:creationId xmlns:a16="http://schemas.microsoft.com/office/drawing/2014/main" id="{0AA8174D-B318-4AB6-9599-24411991B80B}"/>
+                <a16:creationId xmlns:a16="http://schemas.microsoft.com/office/drawing/2014/main" id="{9FEE6209-EA57-48CD-A36F-7EDEC354BFE5}"/>
               </a:ext>
             </a:extLst>
           </p:cNvPr>
@@ -11142,7 +11150,7 @@
           <p:cNvPr id="5" name="">
             <a:extLst xmlns:a="http://schemas.openxmlformats.org/drawingml/2006/main">
               <a:ext uri="{FF2B5EF4-FFF2-40B4-BE49-F238E27FC236}">
-                <a16:creationId xmlns:a16="http://schemas.microsoft.com/office/drawing/2014/main" id="{B84745A9-DD63-4B9B-A345-79C48C618872}"/>
+                <a16:creationId xmlns:a16="http://schemas.microsoft.com/office/drawing/2014/main" id="{E663795A-015F-4107-B9BF-C75BD77BA1AB}"/>
               </a:ext>
             </a:extLst>
           </p:cNvPr>
@@ -11199,7 +11207,7 @@
           <p:cNvPr id="6" name="">
             <a:extLst xmlns:a="http://schemas.openxmlformats.org/drawingml/2006/main">
               <a:ext uri="{FF2B5EF4-FFF2-40B4-BE49-F238E27FC236}">
-                <a16:creationId xmlns:a16="http://schemas.microsoft.com/office/drawing/2014/main" id="{B8BF2536-0572-41D4-AFDA-D734AB7757FD}"/>
+                <a16:creationId xmlns:a16="http://schemas.microsoft.com/office/drawing/2014/main" id="{FA0A8B29-0F3B-4BEC-BCB2-C4EFCE61CE86}"/>
               </a:ext>
             </a:extLst>
           </p:cNvPr>
@@ -11256,7 +11264,7 @@
           <p:cNvPr id="7" name="">
             <a:extLst xmlns:a="http://schemas.openxmlformats.org/drawingml/2006/main">
               <a:ext uri="{FF2B5EF4-FFF2-40B4-BE49-F238E27FC236}">
-                <a16:creationId xmlns:a16="http://schemas.microsoft.com/office/drawing/2014/main" id="{7F8A7788-530D-411E-AFA7-F574EAB2D44D}"/>
+                <a16:creationId xmlns:a16="http://schemas.microsoft.com/office/drawing/2014/main" id="{5D592332-CE7E-4B68-97D9-134AA3E03DEF}"/>
               </a:ext>
             </a:extLst>
           </p:cNvPr>
@@ -11288,7 +11296,7 @@
           <p:cNvPr id="8" name="">
             <a:extLst xmlns:a="http://schemas.openxmlformats.org/drawingml/2006/main">
               <a:ext uri="{FF2B5EF4-FFF2-40B4-BE49-F238E27FC236}">
-                <a16:creationId xmlns:a16="http://schemas.microsoft.com/office/drawing/2014/main" id="{DAA684BB-5D10-442B-BF5C-6CB98F0CEB66}"/>
+                <a16:creationId xmlns:a16="http://schemas.microsoft.com/office/drawing/2014/main" id="{BC3884BE-3C52-433D-AA97-2091616BC1B7}"/>
               </a:ext>
             </a:extLst>
           </p:cNvPr>
@@ -11345,7 +11353,7 @@
           <p:cNvPr id="9" name="">
             <a:extLst xmlns:a="http://schemas.openxmlformats.org/drawingml/2006/main">
               <a:ext uri="{FF2B5EF4-FFF2-40B4-BE49-F238E27FC236}">
-                <a16:creationId xmlns:a16="http://schemas.microsoft.com/office/drawing/2014/main" id="{92669F99-E2FD-40C5-9E6B-573E2BDC5DE7}"/>
+                <a16:creationId xmlns:a16="http://schemas.microsoft.com/office/drawing/2014/main" id="{88BC5534-3448-434D-AC3E-54ABB6F87267}"/>
               </a:ext>
             </a:extLst>
           </p:cNvPr>
@@ -11406,7 +11414,7 @@
           <p:nvPr/>
         </p:nvPicPr>
         <p:blipFill>
-          <a:blip xmlns:r="http://schemas.openxmlformats.org/officeDocument/2006/relationships" xmlns:a="http://schemas.openxmlformats.org/drawingml/2006/main" r:embed="R6cf093932b524100"/>
+          <a:blip xmlns:r="http://schemas.openxmlformats.org/officeDocument/2006/relationships" xmlns:a="http://schemas.openxmlformats.org/drawingml/2006/main" r:embed="Rdefa22dfb6d742f1"/>
           <a:stretch xmlns:a="http://schemas.openxmlformats.org/drawingml/2006/main"/>
         </p:blipFill>
         <p:spPr>
@@ -11424,7 +11432,7 @@
           <p:cNvPr id="11" name="">
             <a:extLst xmlns:a="http://schemas.openxmlformats.org/drawingml/2006/main">
               <a:ext uri="{FF2B5EF4-FFF2-40B4-BE49-F238E27FC236}">
-                <a16:creationId xmlns:a16="http://schemas.microsoft.com/office/drawing/2014/main" id="{67265C04-2461-457C-B7EA-77CFBB40B554}"/>
+                <a16:creationId xmlns:a16="http://schemas.microsoft.com/office/drawing/2014/main" id="{3E1C28DD-6657-4A65-83C3-030885769C5F}"/>
               </a:ext>
             </a:extLst>
           </p:cNvPr>
@@ -11481,7 +11489,7 @@
           <p:cNvPr id="12" name="">
             <a:extLst xmlns:a="http://schemas.openxmlformats.org/drawingml/2006/main">
               <a:ext uri="{FF2B5EF4-FFF2-40B4-BE49-F238E27FC236}">
-                <a16:creationId xmlns:a16="http://schemas.microsoft.com/office/drawing/2014/main" id="{DD57EFAC-1AE8-40CD-9AA9-FE99F298274C}"/>
+                <a16:creationId xmlns:a16="http://schemas.microsoft.com/office/drawing/2014/main" id="{905AEAC3-89E5-4E7B-B175-2FCCCA0FE601}"/>
               </a:ext>
             </a:extLst>
           </p:cNvPr>
@@ -11538,7 +11546,7 @@
           <p:cNvPr id="13" name="">
             <a:extLst xmlns:a="http://schemas.openxmlformats.org/drawingml/2006/main">
               <a:ext uri="{FF2B5EF4-FFF2-40B4-BE49-F238E27FC236}">
-                <a16:creationId xmlns:a16="http://schemas.microsoft.com/office/drawing/2014/main" id="{81E6429D-A329-4E08-B5A1-958F276B0323}"/>
+                <a16:creationId xmlns:a16="http://schemas.microsoft.com/office/drawing/2014/main" id="{384B6A65-B203-408F-967B-E6649C9B79ED}"/>
               </a:ext>
             </a:extLst>
           </p:cNvPr>
@@ -11570,7 +11578,7 @@
           <p:cNvPr id="14" name="">
             <a:extLst xmlns:a="http://schemas.openxmlformats.org/drawingml/2006/main">
               <a:ext uri="{FF2B5EF4-FFF2-40B4-BE49-F238E27FC236}">
-                <a16:creationId xmlns:a16="http://schemas.microsoft.com/office/drawing/2014/main" id="{17B14CAC-97A5-4A7E-83BE-8E8A3C42B1B3}"/>
+                <a16:creationId xmlns:a16="http://schemas.microsoft.com/office/drawing/2014/main" id="{34EDE06E-DBA7-4230-BD9D-D76A7E67AB2E}"/>
               </a:ext>
             </a:extLst>
           </p:cNvPr>
@@ -11627,7 +11635,7 @@
           <p:cNvPr id="15" name="">
             <a:extLst xmlns:a="http://schemas.openxmlformats.org/drawingml/2006/main">
               <a:ext uri="{FF2B5EF4-FFF2-40B4-BE49-F238E27FC236}">
-                <a16:creationId xmlns:a16="http://schemas.microsoft.com/office/drawing/2014/main" id="{7BC464D0-0799-42EC-BC11-CA5F382FC21E}"/>
+                <a16:creationId xmlns:a16="http://schemas.microsoft.com/office/drawing/2014/main" id="{A72DA24C-9A08-4097-A033-10DF44434158}"/>
               </a:ext>
             </a:extLst>
           </p:cNvPr>
@@ -11682,7 +11690,7 @@
     </p:spTree>
     <p:extLst>
       <p:ext uri="{BB962C8B-B14F-4D97-AF65-F5344CB8AC3E}">
-        <p14:creationId xmlns:p14="http://schemas.microsoft.com/office/powerpoint/2010/main" val="2019269446"/>
+        <p14:creationId xmlns:p14="http://schemas.microsoft.com/office/powerpoint/2010/main" val="928636644"/>
       </p:ext>
     </p:extLst>
   </p:cSld>
@@ -11837,7 +11845,7 @@
           <p:cNvPr id="23" name="">
             <a:extLst xmlns:a="http://schemas.openxmlformats.org/drawingml/2006/main">
               <a:ext uri="{FF2B5EF4-FFF2-40B4-BE49-F238E27FC236}">
-                <a16:creationId xmlns:a16="http://schemas.microsoft.com/office/drawing/2014/main" id="{BB4D372F-1594-40A2-9804-F421334144DB}"/>
+                <a16:creationId xmlns:a16="http://schemas.microsoft.com/office/drawing/2014/main" id="{4E367DBD-C562-4174-9C4B-4E300DA0F6EB}"/>
               </a:ext>
             </a:extLst>
           </p:cNvPr>
@@ -11869,7 +11877,7 @@
           <p:cNvPr id="2" name="">
             <a:extLst xmlns:a="http://schemas.openxmlformats.org/drawingml/2006/main">
               <a:ext uri="{FF2B5EF4-FFF2-40B4-BE49-F238E27FC236}">
-                <a16:creationId xmlns:a16="http://schemas.microsoft.com/office/drawing/2014/main" id="{4EF6881E-DA80-4884-88ED-EC588A08D1ED}"/>
+                <a16:creationId xmlns:a16="http://schemas.microsoft.com/office/drawing/2014/main" id="{7AB3342A-1BFB-4B46-B271-770E564B69A2}"/>
               </a:ext>
             </a:extLst>
           </p:cNvPr>
@@ -11926,7 +11934,7 @@
           <p:cNvPr id="3" name="">
             <a:extLst xmlns:a="http://schemas.openxmlformats.org/drawingml/2006/main">
               <a:ext uri="{FF2B5EF4-FFF2-40B4-BE49-F238E27FC236}">
-                <a16:creationId xmlns:a16="http://schemas.microsoft.com/office/drawing/2014/main" id="{0DE64C67-6362-48D5-9096-2D9AE3386B92}"/>
+                <a16:creationId xmlns:a16="http://schemas.microsoft.com/office/drawing/2014/main" id="{0D246607-8328-4AEE-B3EA-A74F9F8C1F3D}"/>
               </a:ext>
             </a:extLst>
           </p:cNvPr>
@@ -11958,7 +11966,7 @@
           <p:cNvPr id="4" name="">
             <a:extLst xmlns:a="http://schemas.openxmlformats.org/drawingml/2006/main">
               <a:ext uri="{FF2B5EF4-FFF2-40B4-BE49-F238E27FC236}">
-                <a16:creationId xmlns:a16="http://schemas.microsoft.com/office/drawing/2014/main" id="{A5336AA0-4139-4477-BBD9-CF7FCDEC6B6D}"/>
+                <a16:creationId xmlns:a16="http://schemas.microsoft.com/office/drawing/2014/main" id="{FA3BA1AF-B2C4-4023-B520-FFCED26E820E}"/>
               </a:ext>
             </a:extLst>
           </p:cNvPr>
@@ -12015,7 +12023,7 @@
           <p:cNvPr id="5" name="">
             <a:extLst xmlns:a="http://schemas.openxmlformats.org/drawingml/2006/main">
               <a:ext uri="{FF2B5EF4-FFF2-40B4-BE49-F238E27FC236}">
-                <a16:creationId xmlns:a16="http://schemas.microsoft.com/office/drawing/2014/main" id="{254BDDD2-B801-43C1-80F5-B446F03E8919}"/>
+                <a16:creationId xmlns:a16="http://schemas.microsoft.com/office/drawing/2014/main" id="{6DCC3253-293D-42A7-9C91-C5773C42DA1B}"/>
               </a:ext>
             </a:extLst>
           </p:cNvPr>
@@ -12072,7 +12080,7 @@
           <p:cNvPr id="6" name="">
             <a:extLst xmlns:a="http://schemas.openxmlformats.org/drawingml/2006/main">
               <a:ext uri="{FF2B5EF4-FFF2-40B4-BE49-F238E27FC236}">
-                <a16:creationId xmlns:a16="http://schemas.microsoft.com/office/drawing/2014/main" id="{53DF83F3-18B9-4E32-9976-C8B8DB4F5670}"/>
+                <a16:creationId xmlns:a16="http://schemas.microsoft.com/office/drawing/2014/main" id="{7E3AA1B8-0AF2-4049-A50C-F068636C4478}"/>
               </a:ext>
             </a:extLst>
           </p:cNvPr>
@@ -12129,7 +12137,7 @@
           <p:cNvPr id="7" name="">
             <a:extLst xmlns:a="http://schemas.openxmlformats.org/drawingml/2006/main">
               <a:ext uri="{FF2B5EF4-FFF2-40B4-BE49-F238E27FC236}">
-                <a16:creationId xmlns:a16="http://schemas.microsoft.com/office/drawing/2014/main" id="{DB94745F-2318-4806-8711-F1B2EDD0F855}"/>
+                <a16:creationId xmlns:a16="http://schemas.microsoft.com/office/drawing/2014/main" id="{B67BDD8F-148E-4DD9-AD47-2DDC4BF7EB26}"/>
               </a:ext>
             </a:extLst>
           </p:cNvPr>
@@ -12161,7 +12169,7 @@
           <p:cNvPr id="8" name="">
             <a:extLst xmlns:a="http://schemas.openxmlformats.org/drawingml/2006/main">
               <a:ext uri="{FF2B5EF4-FFF2-40B4-BE49-F238E27FC236}">
-                <a16:creationId xmlns:a16="http://schemas.microsoft.com/office/drawing/2014/main" id="{E1844AEF-BB56-4DDD-9A5B-63FFABC5A66E}"/>
+                <a16:creationId xmlns:a16="http://schemas.microsoft.com/office/drawing/2014/main" id="{203D9C21-2619-477C-BF9B-141E35813168}"/>
               </a:ext>
             </a:extLst>
           </p:cNvPr>
@@ -12218,7 +12226,7 @@
           <p:cNvPr id="9" name="">
             <a:extLst xmlns:a="http://schemas.openxmlformats.org/drawingml/2006/main">
               <a:ext uri="{FF2B5EF4-FFF2-40B4-BE49-F238E27FC236}">
-                <a16:creationId xmlns:a16="http://schemas.microsoft.com/office/drawing/2014/main" id="{F7BE5C38-BE5D-4496-B98D-19BFC3B77EC3}"/>
+                <a16:creationId xmlns:a16="http://schemas.microsoft.com/office/drawing/2014/main" id="{45A208CE-2752-4B3F-BE3B-65572FB03FFB}"/>
               </a:ext>
             </a:extLst>
           </p:cNvPr>
@@ -12275,7 +12283,7 @@
           <p:cNvPr id="10" name="">
             <a:extLst xmlns:a="http://schemas.openxmlformats.org/drawingml/2006/main">
               <a:ext uri="{FF2B5EF4-FFF2-40B4-BE49-F238E27FC236}">
-                <a16:creationId xmlns:a16="http://schemas.microsoft.com/office/drawing/2014/main" id="{9E485A9C-AB16-4B9E-AA93-2E8A662B18BA}"/>
+                <a16:creationId xmlns:a16="http://schemas.microsoft.com/office/drawing/2014/main" id="{6E1876A2-7CBB-41AE-AF35-A17D8DF09CF0}"/>
               </a:ext>
             </a:extLst>
           </p:cNvPr>
@@ -12309,7 +12317,7 @@
           <p:cNvPr id="11" name="">
             <a:extLst xmlns:a="http://schemas.openxmlformats.org/drawingml/2006/main">
               <a:ext uri="{FF2B5EF4-FFF2-40B4-BE49-F238E27FC236}">
-                <a16:creationId xmlns:a16="http://schemas.microsoft.com/office/drawing/2014/main" id="{37812362-1CB9-4494-99B7-D5F4033E7A91}"/>
+                <a16:creationId xmlns:a16="http://schemas.microsoft.com/office/drawing/2014/main" id="{17F277EE-B2C0-4B6C-95F0-C279B25D791D}"/>
               </a:ext>
             </a:extLst>
           </p:cNvPr>
@@ -12341,7 +12349,7 @@
           <p:cNvPr id="12" name="">
             <a:extLst xmlns:a="http://schemas.openxmlformats.org/drawingml/2006/main">
               <a:ext uri="{FF2B5EF4-FFF2-40B4-BE49-F238E27FC236}">
-                <a16:creationId xmlns:a16="http://schemas.microsoft.com/office/drawing/2014/main" id="{0BB88F85-C3B2-47D1-9AB9-3E740BC2917E}"/>
+                <a16:creationId xmlns:a16="http://schemas.microsoft.com/office/drawing/2014/main" id="{94A1C9A5-9EB6-4D8C-859D-0FDFBF9EB6C5}"/>
               </a:ext>
             </a:extLst>
           </p:cNvPr>
@@ -12398,7 +12406,7 @@
           <p:cNvPr id="13" name="">
             <a:extLst xmlns:a="http://schemas.openxmlformats.org/drawingml/2006/main">
               <a:ext uri="{FF2B5EF4-FFF2-40B4-BE49-F238E27FC236}">
-                <a16:creationId xmlns:a16="http://schemas.microsoft.com/office/drawing/2014/main" id="{B3A5ED07-9C87-4583-8317-E39FA9A1F3D4}"/>
+                <a16:creationId xmlns:a16="http://schemas.microsoft.com/office/drawing/2014/main" id="{08DA8508-9BAB-443A-BE3E-DB67CAF5E75E}"/>
               </a:ext>
             </a:extLst>
           </p:cNvPr>
@@ -12455,7 +12463,7 @@
           <p:cNvPr id="14" name="">
             <a:extLst xmlns:a="http://schemas.openxmlformats.org/drawingml/2006/main">
               <a:ext uri="{FF2B5EF4-FFF2-40B4-BE49-F238E27FC236}">
-                <a16:creationId xmlns:a16="http://schemas.microsoft.com/office/drawing/2014/main" id="{ACBA5859-4EC8-4E8B-B6F5-C8E77D1A7A2B}"/>
+                <a16:creationId xmlns:a16="http://schemas.microsoft.com/office/drawing/2014/main" id="{E4591CEB-2867-4386-915F-BC33761C1A93}"/>
               </a:ext>
             </a:extLst>
           </p:cNvPr>
@@ -12489,7 +12497,7 @@
           <p:cNvPr id="15" name="">
             <a:extLst xmlns:a="http://schemas.openxmlformats.org/drawingml/2006/main">
               <a:ext uri="{FF2B5EF4-FFF2-40B4-BE49-F238E27FC236}">
-                <a16:creationId xmlns:a16="http://schemas.microsoft.com/office/drawing/2014/main" id="{B6264E12-8FAA-44B6-B213-10F283775C01}"/>
+                <a16:creationId xmlns:a16="http://schemas.microsoft.com/office/drawing/2014/main" id="{7215875F-482E-4AEA-B6F7-137D4C6AC3EF}"/>
               </a:ext>
             </a:extLst>
           </p:cNvPr>
@@ -12521,7 +12529,7 @@
           <p:cNvPr id="16" name="">
             <a:extLst xmlns:a="http://schemas.openxmlformats.org/drawingml/2006/main">
               <a:ext uri="{FF2B5EF4-FFF2-40B4-BE49-F238E27FC236}">
-                <a16:creationId xmlns:a16="http://schemas.microsoft.com/office/drawing/2014/main" id="{11B2F847-E1B7-4613-8FDF-0CF346A52280}"/>
+                <a16:creationId xmlns:a16="http://schemas.microsoft.com/office/drawing/2014/main" id="{4B378335-B96A-42F1-8C25-A45946C90E09}"/>
               </a:ext>
             </a:extLst>
           </p:cNvPr>
@@ -12578,7 +12586,7 @@
           <p:cNvPr id="17" name="">
             <a:extLst xmlns:a="http://schemas.openxmlformats.org/drawingml/2006/main">
               <a:ext uri="{FF2B5EF4-FFF2-40B4-BE49-F238E27FC236}">
-                <a16:creationId xmlns:a16="http://schemas.microsoft.com/office/drawing/2014/main" id="{74209C60-2F45-4159-BC48-E136C2ABDE0C}"/>
+                <a16:creationId xmlns:a16="http://schemas.microsoft.com/office/drawing/2014/main" id="{CDF7D56A-BC46-4E68-A444-9878D85A6F42}"/>
               </a:ext>
             </a:extLst>
           </p:cNvPr>
@@ -12635,7 +12643,7 @@
           <p:cNvPr id="18" name="">
             <a:extLst xmlns:a="http://schemas.openxmlformats.org/drawingml/2006/main">
               <a:ext uri="{FF2B5EF4-FFF2-40B4-BE49-F238E27FC236}">
-                <a16:creationId xmlns:a16="http://schemas.microsoft.com/office/drawing/2014/main" id="{9721BE3C-D19F-4B8A-8616-E3CDC9F13581}"/>
+                <a16:creationId xmlns:a16="http://schemas.microsoft.com/office/drawing/2014/main" id="{0774799B-FA0B-41BD-9E98-EB09250CF06A}"/>
               </a:ext>
             </a:extLst>
           </p:cNvPr>
@@ -12669,7 +12677,7 @@
           <p:cNvPr id="19" name="">
             <a:extLst xmlns:a="http://schemas.openxmlformats.org/drawingml/2006/main">
               <a:ext uri="{FF2B5EF4-FFF2-40B4-BE49-F238E27FC236}">
-                <a16:creationId xmlns:a16="http://schemas.microsoft.com/office/drawing/2014/main" id="{514B08D5-BBBC-4A13-96D9-E9FCB7CE1EC6}"/>
+                <a16:creationId xmlns:a16="http://schemas.microsoft.com/office/drawing/2014/main" id="{E9C18FE0-5120-4AE6-9770-119CF2CE58A0}"/>
               </a:ext>
             </a:extLst>
           </p:cNvPr>
@@ -12701,7 +12709,7 @@
           <p:cNvPr id="20" name="">
             <a:extLst xmlns:a="http://schemas.openxmlformats.org/drawingml/2006/main">
               <a:ext uri="{FF2B5EF4-FFF2-40B4-BE49-F238E27FC236}">
-                <a16:creationId xmlns:a16="http://schemas.microsoft.com/office/drawing/2014/main" id="{F78E4255-161D-4D3A-883C-2ECD469158B3}"/>
+                <a16:creationId xmlns:a16="http://schemas.microsoft.com/office/drawing/2014/main" id="{FABFA08F-39AC-458E-9067-DA1741BA4A27}"/>
               </a:ext>
             </a:extLst>
           </p:cNvPr>
@@ -12758,7 +12766,7 @@
           <p:cNvPr id="21" name="">
             <a:extLst xmlns:a="http://schemas.openxmlformats.org/drawingml/2006/main">
               <a:ext uri="{FF2B5EF4-FFF2-40B4-BE49-F238E27FC236}">
-                <a16:creationId xmlns:a16="http://schemas.microsoft.com/office/drawing/2014/main" id="{99A47E34-726D-4AF3-8175-4F9AC96E4B5B}"/>
+                <a16:creationId xmlns:a16="http://schemas.microsoft.com/office/drawing/2014/main" id="{DB173F7C-8722-4DC5-A59B-14AE2DB2C3F8}"/>
               </a:ext>
             </a:extLst>
           </p:cNvPr>
@@ -12815,7 +12823,7 @@
           <p:cNvPr id="22" name="">
             <a:extLst xmlns:a="http://schemas.openxmlformats.org/drawingml/2006/main">
               <a:ext uri="{FF2B5EF4-FFF2-40B4-BE49-F238E27FC236}">
-                <a16:creationId xmlns:a16="http://schemas.microsoft.com/office/drawing/2014/main" id="{31C15F9F-0577-4CBB-A848-A8B6387CC0FD}"/>
+                <a16:creationId xmlns:a16="http://schemas.microsoft.com/office/drawing/2014/main" id="{A95CC5CA-BC61-4D94-8BC2-D98027D69B42}"/>
               </a:ext>
             </a:extLst>
           </p:cNvPr>
@@ -12870,7 +12878,7 @@
     </p:spTree>
     <p:extLst>
       <p:ext uri="{BB962C8B-B14F-4D97-AF65-F5344CB8AC3E}">
-        <p14:creationId xmlns:p14="http://schemas.microsoft.com/office/powerpoint/2010/main" val="1848376783"/>
+        <p14:creationId xmlns:p14="http://schemas.microsoft.com/office/powerpoint/2010/main" val="1040337618"/>
       </p:ext>
     </p:extLst>
   </p:cSld>
@@ -13071,7 +13079,7 @@
           <p:cNvPr id="22" name="">
             <a:extLst xmlns:a="http://schemas.openxmlformats.org/drawingml/2006/main">
               <a:ext uri="{FF2B5EF4-FFF2-40B4-BE49-F238E27FC236}">
-                <a16:creationId xmlns:a16="http://schemas.microsoft.com/office/drawing/2014/main" id="{BB12CB58-A79A-4D31-B22B-9AF6E24CD0F4}"/>
+                <a16:creationId xmlns:a16="http://schemas.microsoft.com/office/drawing/2014/main" id="{0A6F1550-41D8-4EF3-967B-944A232B0073}"/>
               </a:ext>
             </a:extLst>
           </p:cNvPr>
@@ -13103,7 +13111,7 @@
           <p:cNvPr id="2" name="">
             <a:extLst xmlns:a="http://schemas.openxmlformats.org/drawingml/2006/main">
               <a:ext uri="{FF2B5EF4-FFF2-40B4-BE49-F238E27FC236}">
-                <a16:creationId xmlns:a16="http://schemas.microsoft.com/office/drawing/2014/main" id="{A3FFA3FD-F331-48FF-B1B1-7D4A499FBC92}"/>
+                <a16:creationId xmlns:a16="http://schemas.microsoft.com/office/drawing/2014/main" id="{88EBD06D-9FA3-4F04-8855-D290011D8A48}"/>
               </a:ext>
             </a:extLst>
           </p:cNvPr>
@@ -13160,7 +13168,7 @@
           <p:cNvPr id="3" name="">
             <a:extLst xmlns:a="http://schemas.openxmlformats.org/drawingml/2006/main">
               <a:ext uri="{FF2B5EF4-FFF2-40B4-BE49-F238E27FC236}">
-                <a16:creationId xmlns:a16="http://schemas.microsoft.com/office/drawing/2014/main" id="{9024C43B-5659-4683-86F5-5A8D7F79A0BC}"/>
+                <a16:creationId xmlns:a16="http://schemas.microsoft.com/office/drawing/2014/main" id="{A5C7DD38-6CA3-494A-AF8B-343EE0F89DF2}"/>
               </a:ext>
             </a:extLst>
           </p:cNvPr>
@@ -13192,7 +13200,7 @@
           <p:cNvPr id="4" name="">
             <a:extLst xmlns:a="http://schemas.openxmlformats.org/drawingml/2006/main">
               <a:ext uri="{FF2B5EF4-FFF2-40B4-BE49-F238E27FC236}">
-                <a16:creationId xmlns:a16="http://schemas.microsoft.com/office/drawing/2014/main" id="{301CB407-ED61-46E0-A73C-5CED86853D5A}"/>
+                <a16:creationId xmlns:a16="http://schemas.microsoft.com/office/drawing/2014/main" id="{ADC3B1F8-4ADF-49C9-8082-8FE54A2B563D}"/>
               </a:ext>
             </a:extLst>
           </p:cNvPr>
@@ -13249,7 +13257,7 @@
           <p:cNvPr id="5" name="">
             <a:extLst xmlns:a="http://schemas.openxmlformats.org/drawingml/2006/main">
               <a:ext uri="{FF2B5EF4-FFF2-40B4-BE49-F238E27FC236}">
-                <a16:creationId xmlns:a16="http://schemas.microsoft.com/office/drawing/2014/main" id="{30211E9C-CD33-415F-8995-F33B180C3247}"/>
+                <a16:creationId xmlns:a16="http://schemas.microsoft.com/office/drawing/2014/main" id="{5A4F6B8B-C042-4160-97AD-A1A6E88573D3}"/>
               </a:ext>
             </a:extLst>
           </p:cNvPr>
@@ -13306,7 +13314,7 @@
           <p:cNvPr id="6" name="">
             <a:extLst xmlns:a="http://schemas.openxmlformats.org/drawingml/2006/main">
               <a:ext uri="{FF2B5EF4-FFF2-40B4-BE49-F238E27FC236}">
-                <a16:creationId xmlns:a16="http://schemas.microsoft.com/office/drawing/2014/main" id="{EF105712-FF19-4CDC-99E5-EF778AB25897}"/>
+                <a16:creationId xmlns:a16="http://schemas.microsoft.com/office/drawing/2014/main" id="{94CDF38F-565F-46CA-8CE1-5F753E94E213}"/>
               </a:ext>
             </a:extLst>
           </p:cNvPr>
@@ -13363,7 +13371,7 @@
           <p:cNvPr id="7" name="">
             <a:extLst xmlns:a="http://schemas.openxmlformats.org/drawingml/2006/main">
               <a:ext uri="{FF2B5EF4-FFF2-40B4-BE49-F238E27FC236}">
-                <a16:creationId xmlns:a16="http://schemas.microsoft.com/office/drawing/2014/main" id="{6CD0FDCB-B30A-488D-B983-FA3DFBC84C2B}"/>
+                <a16:creationId xmlns:a16="http://schemas.microsoft.com/office/drawing/2014/main" id="{3B23A2A4-7D91-4B5D-929C-706EFCA84095}"/>
               </a:ext>
             </a:extLst>
           </p:cNvPr>
@@ -13395,7 +13403,7 @@
           <p:cNvPr id="8" name="">
             <a:extLst xmlns:a="http://schemas.openxmlformats.org/drawingml/2006/main">
               <a:ext uri="{FF2B5EF4-FFF2-40B4-BE49-F238E27FC236}">
-                <a16:creationId xmlns:a16="http://schemas.microsoft.com/office/drawing/2014/main" id="{7D06A917-051F-43E8-BED1-736EABE6A9A5}"/>
+                <a16:creationId xmlns:a16="http://schemas.microsoft.com/office/drawing/2014/main" id="{87B496DE-41E4-4940-BF13-86DC7C08E2CD}"/>
               </a:ext>
             </a:extLst>
           </p:cNvPr>
@@ -13452,7 +13460,7 @@
           <p:cNvPr id="9" name="">
             <a:extLst xmlns:a="http://schemas.openxmlformats.org/drawingml/2006/main">
               <a:ext uri="{FF2B5EF4-FFF2-40B4-BE49-F238E27FC236}">
-                <a16:creationId xmlns:a16="http://schemas.microsoft.com/office/drawing/2014/main" id="{A2AACA79-5071-4702-A5B6-50D345D3874F}"/>
+                <a16:creationId xmlns:a16="http://schemas.microsoft.com/office/drawing/2014/main" id="{A8B26E86-F978-4278-860B-5626CFAE6922}"/>
               </a:ext>
             </a:extLst>
           </p:cNvPr>
@@ -13509,7 +13517,7 @@
           <p:cNvPr id="10" name="">
             <a:extLst xmlns:a="http://schemas.openxmlformats.org/drawingml/2006/main">
               <a:ext uri="{FF2B5EF4-FFF2-40B4-BE49-F238E27FC236}">
-                <a16:creationId xmlns:a16="http://schemas.microsoft.com/office/drawing/2014/main" id="{D51EF028-83C3-4AC3-9E30-B0B6B74F5174}"/>
+                <a16:creationId xmlns:a16="http://schemas.microsoft.com/office/drawing/2014/main" id="{98865C9C-4FDE-4B58-B550-97DB7CFC793B}"/>
               </a:ext>
             </a:extLst>
           </p:cNvPr>
@@ -13543,7 +13551,7 @@
           <p:cNvPr id="11" name="">
             <a:extLst xmlns:a="http://schemas.openxmlformats.org/drawingml/2006/main">
               <a:ext uri="{FF2B5EF4-FFF2-40B4-BE49-F238E27FC236}">
-                <a16:creationId xmlns:a16="http://schemas.microsoft.com/office/drawing/2014/main" id="{2835324B-2637-44E9-93AE-BF293CC6E43F}"/>
+                <a16:creationId xmlns:a16="http://schemas.microsoft.com/office/drawing/2014/main" id="{7D2111AD-C075-4AB9-AEA8-6986456AEDAD}"/>
               </a:ext>
             </a:extLst>
           </p:cNvPr>
@@ -13575,7 +13583,7 @@
           <p:cNvPr id="12" name="">
             <a:extLst xmlns:a="http://schemas.openxmlformats.org/drawingml/2006/main">
               <a:ext uri="{FF2B5EF4-FFF2-40B4-BE49-F238E27FC236}">
-                <a16:creationId xmlns:a16="http://schemas.microsoft.com/office/drawing/2014/main" id="{92089FA4-96CE-4724-87F1-3DB3AD5D58E4}"/>
+                <a16:creationId xmlns:a16="http://schemas.microsoft.com/office/drawing/2014/main" id="{E99F84A3-4D02-4DD8-82AC-F235E71FC3CC}"/>
               </a:ext>
             </a:extLst>
           </p:cNvPr>
@@ -13632,7 +13640,7 @@
           <p:cNvPr id="13" name="">
             <a:extLst xmlns:a="http://schemas.openxmlformats.org/drawingml/2006/main">
               <a:ext uri="{FF2B5EF4-FFF2-40B4-BE49-F238E27FC236}">
-                <a16:creationId xmlns:a16="http://schemas.microsoft.com/office/drawing/2014/main" id="{807F9714-06E6-4061-B801-A6B58FD27A44}"/>
+                <a16:creationId xmlns:a16="http://schemas.microsoft.com/office/drawing/2014/main" id="{42C4A600-4BA3-4753-9003-DA3CB18C50B0}"/>
               </a:ext>
             </a:extLst>
           </p:cNvPr>
@@ -13689,7 +13697,7 @@
           <p:cNvPr id="14" name="">
             <a:extLst xmlns:a="http://schemas.openxmlformats.org/drawingml/2006/main">
               <a:ext uri="{FF2B5EF4-FFF2-40B4-BE49-F238E27FC236}">
-                <a16:creationId xmlns:a16="http://schemas.microsoft.com/office/drawing/2014/main" id="{8A6F9A10-3CED-4096-8C46-ADF05C386F4C}"/>
+                <a16:creationId xmlns:a16="http://schemas.microsoft.com/office/drawing/2014/main" id="{221621B5-7476-4159-8CFD-78A332A6B9E9}"/>
               </a:ext>
             </a:extLst>
           </p:cNvPr>
@@ -13723,7 +13731,7 @@
           <p:cNvPr id="15" name="">
             <a:extLst xmlns:a="http://schemas.openxmlformats.org/drawingml/2006/main">
               <a:ext uri="{FF2B5EF4-FFF2-40B4-BE49-F238E27FC236}">
-                <a16:creationId xmlns:a16="http://schemas.microsoft.com/office/drawing/2014/main" id="{3C57BE16-39F3-4205-9E88-3371E206F4B3}"/>
+                <a16:creationId xmlns:a16="http://schemas.microsoft.com/office/drawing/2014/main" id="{986293B7-54EE-42F4-85DD-189461C99D72}"/>
               </a:ext>
             </a:extLst>
           </p:cNvPr>
@@ -13755,7 +13763,7 @@
           <p:cNvPr id="16" name="">
             <a:extLst xmlns:a="http://schemas.openxmlformats.org/drawingml/2006/main">
               <a:ext uri="{FF2B5EF4-FFF2-40B4-BE49-F238E27FC236}">
-                <a16:creationId xmlns:a16="http://schemas.microsoft.com/office/drawing/2014/main" id="{76D93226-3B0F-4EB9-B425-094370DB2E05}"/>
+                <a16:creationId xmlns:a16="http://schemas.microsoft.com/office/drawing/2014/main" id="{280B790A-0E3D-4BFC-BC1C-21E940C77CA4}"/>
               </a:ext>
             </a:extLst>
           </p:cNvPr>
@@ -13812,7 +13820,7 @@
           <p:cNvPr id="17" name="">
             <a:extLst xmlns:a="http://schemas.openxmlformats.org/drawingml/2006/main">
               <a:ext uri="{FF2B5EF4-FFF2-40B4-BE49-F238E27FC236}">
-                <a16:creationId xmlns:a16="http://schemas.microsoft.com/office/drawing/2014/main" id="{50A98C6B-0073-48E3-98FA-2087F018FA97}"/>
+                <a16:creationId xmlns:a16="http://schemas.microsoft.com/office/drawing/2014/main" id="{7E365D2B-336D-484F-89D4-28D86595ECA5}"/>
               </a:ext>
             </a:extLst>
           </p:cNvPr>
@@ -13869,7 +13877,7 @@
           <p:cNvPr id="18" name="">
             <a:extLst xmlns:a="http://schemas.openxmlformats.org/drawingml/2006/main">
               <a:ext uri="{FF2B5EF4-FFF2-40B4-BE49-F238E27FC236}">
-                <a16:creationId xmlns:a16="http://schemas.microsoft.com/office/drawing/2014/main" id="{D4D016D2-7053-44CB-9174-1046FD6062CE}"/>
+                <a16:creationId xmlns:a16="http://schemas.microsoft.com/office/drawing/2014/main" id="{7ADA3064-EAF6-4E89-80B1-422B246A3C9F}"/>
               </a:ext>
             </a:extLst>
           </p:cNvPr>
@@ -13903,7 +13911,7 @@
           <p:cNvPr id="19" name="">
             <a:extLst xmlns:a="http://schemas.openxmlformats.org/drawingml/2006/main">
               <a:ext uri="{FF2B5EF4-FFF2-40B4-BE49-F238E27FC236}">
-                <a16:creationId xmlns:a16="http://schemas.microsoft.com/office/drawing/2014/main" id="{43512D78-1ACD-4D11-B306-6B9EBF65729E}"/>
+                <a16:creationId xmlns:a16="http://schemas.microsoft.com/office/drawing/2014/main" id="{678E1064-C9A5-4671-A9DA-5AC8E5741542}"/>
               </a:ext>
             </a:extLst>
           </p:cNvPr>
@@ -13935,7 +13943,7 @@
           <p:cNvPr id="20" name="">
             <a:extLst xmlns:a="http://schemas.openxmlformats.org/drawingml/2006/main">
               <a:ext uri="{FF2B5EF4-FFF2-40B4-BE49-F238E27FC236}">
-                <a16:creationId xmlns:a16="http://schemas.microsoft.com/office/drawing/2014/main" id="{265CB4E2-E462-4F2D-97AF-4012E3182115}"/>
+                <a16:creationId xmlns:a16="http://schemas.microsoft.com/office/drawing/2014/main" id="{205EC2FB-534A-4EB1-A904-71AF3AB2186A}"/>
               </a:ext>
             </a:extLst>
           </p:cNvPr>
@@ -13992,7 +14000,7 @@
           <p:cNvPr id="21" name="">
             <a:extLst xmlns:a="http://schemas.openxmlformats.org/drawingml/2006/main">
               <a:ext uri="{FF2B5EF4-FFF2-40B4-BE49-F238E27FC236}">
-                <a16:creationId xmlns:a16="http://schemas.microsoft.com/office/drawing/2014/main" id="{AD90E001-4246-4151-8A0C-20C1CC1159AF}"/>
+                <a16:creationId xmlns:a16="http://schemas.microsoft.com/office/drawing/2014/main" id="{722946EE-5A7D-406D-B574-4844AC26C737}"/>
               </a:ext>
             </a:extLst>
           </p:cNvPr>
@@ -14047,7 +14055,7 @@
     </p:spTree>
     <p:extLst>
       <p:ext uri="{BB962C8B-B14F-4D97-AF65-F5344CB8AC3E}">
-        <p14:creationId xmlns:p14="http://schemas.microsoft.com/office/powerpoint/2010/main" val="959838302"/>
+        <p14:creationId xmlns:p14="http://schemas.microsoft.com/office/powerpoint/2010/main" val="1998595068"/>
       </p:ext>
     </p:extLst>
   </p:cSld>
